--- a/ppt/PythonMath06-Numpy.pptx
+++ b/ppt/PythonMath06-Numpy.pptx
@@ -5,10 +5,10 @@
     <p:sldMasterId id="2147483653" r:id="rId1"/>
   </p:sldMasterIdLst>
   <p:notesMasterIdLst>
-    <p:notesMasterId r:id="rId24"/>
+    <p:notesMasterId r:id="rId20"/>
   </p:notesMasterIdLst>
   <p:handoutMasterIdLst>
-    <p:handoutMasterId r:id="rId25"/>
+    <p:handoutMasterId r:id="rId21"/>
   </p:handoutMasterIdLst>
   <p:sldIdLst>
     <p:sldId id="264" r:id="rId2"/>
@@ -16,23 +16,19 @@
     <p:sldId id="266" r:id="rId4"/>
     <p:sldId id="291" r:id="rId5"/>
     <p:sldId id="285" r:id="rId6"/>
-    <p:sldId id="293" r:id="rId7"/>
-    <p:sldId id="295" r:id="rId8"/>
-    <p:sldId id="296" r:id="rId9"/>
-    <p:sldId id="297" r:id="rId10"/>
-    <p:sldId id="298" r:id="rId11"/>
-    <p:sldId id="286" r:id="rId12"/>
-    <p:sldId id="300" r:id="rId13"/>
-    <p:sldId id="274" r:id="rId14"/>
-    <p:sldId id="301" r:id="rId15"/>
-    <p:sldId id="302" r:id="rId16"/>
-    <p:sldId id="284" r:id="rId17"/>
-    <p:sldId id="290" r:id="rId18"/>
-    <p:sldId id="287" r:id="rId19"/>
-    <p:sldId id="288" r:id="rId20"/>
-    <p:sldId id="289" r:id="rId21"/>
-    <p:sldId id="283" r:id="rId22"/>
-    <p:sldId id="303" r:id="rId23"/>
+    <p:sldId id="297" r:id="rId7"/>
+    <p:sldId id="286" r:id="rId8"/>
+    <p:sldId id="300" r:id="rId9"/>
+    <p:sldId id="274" r:id="rId10"/>
+    <p:sldId id="301" r:id="rId11"/>
+    <p:sldId id="302" r:id="rId12"/>
+    <p:sldId id="284" r:id="rId13"/>
+    <p:sldId id="290" r:id="rId14"/>
+    <p:sldId id="287" r:id="rId15"/>
+    <p:sldId id="288" r:id="rId16"/>
+    <p:sldId id="289" r:id="rId17"/>
+    <p:sldId id="283" r:id="rId18"/>
+    <p:sldId id="303" r:id="rId19"/>
   </p:sldIdLst>
   <p:sldSz cx="9144000" cy="6858000" type="screen4x3"/>
   <p:notesSz cx="6648450" cy="9782175"/>
@@ -625,35 +621,35 @@
           <a:p>
             <a:pPr lvl="0"/>
             <a:r>
-              <a:rPr lang="fr-FR" noProof="0" smtClean="0"/>
+              <a:rPr lang="fr-FR" noProof="0"/>
               <a:t>Cliquez pour modifier les styles du texte du masque</a:t>
             </a:r>
           </a:p>
           <a:p>
             <a:pPr lvl="1"/>
             <a:r>
-              <a:rPr lang="fr-FR" noProof="0" smtClean="0"/>
+              <a:rPr lang="fr-FR" noProof="0"/>
               <a:t>Deuxième niveau</a:t>
             </a:r>
           </a:p>
           <a:p>
             <a:pPr lvl="2"/>
             <a:r>
-              <a:rPr lang="fr-FR" noProof="0" smtClean="0"/>
+              <a:rPr lang="fr-FR" noProof="0"/>
               <a:t>Troisième niveau</a:t>
             </a:r>
           </a:p>
           <a:p>
             <a:pPr lvl="3"/>
             <a:r>
-              <a:rPr lang="fr-FR" noProof="0" smtClean="0"/>
+              <a:rPr lang="fr-FR" noProof="0"/>
               <a:t>Quatrième niveau</a:t>
             </a:r>
           </a:p>
           <a:p>
             <a:pPr lvl="4"/>
             <a:r>
-              <a:rPr lang="fr-FR" noProof="0" smtClean="0"/>
+              <a:rPr lang="fr-FR" noProof="0"/>
               <a:t>Cinquième niveau</a:t>
             </a:r>
           </a:p>
@@ -941,10 +937,9 @@
           <a:lstStyle/>
           <a:p>
             <a:r>
-              <a:rPr lang="fr-FR" smtClean="0"/>
+              <a:rPr lang="fr-FR"/>
               <a:t>Cliquez pour modifier le style du titre</a:t>
             </a:r>
-            <a:endParaRPr lang="fr-FR"/>
           </a:p>
         </p:txBody>
       </p:sp>
@@ -1006,10 +1001,9 @@
           </a:lstStyle>
           <a:p>
             <a:r>
-              <a:rPr lang="fr-FR" smtClean="0"/>
+              <a:rPr lang="fr-FR"/>
               <a:t>Cliquez pour modifier le style des sous-titres du masque</a:t>
             </a:r>
-            <a:endParaRPr lang="fr-FR"/>
           </a:p>
         </p:txBody>
       </p:sp>
@@ -1064,10 +1058,9 @@
           <a:lstStyle/>
           <a:p>
             <a:r>
-              <a:rPr lang="fr-FR" smtClean="0"/>
+              <a:rPr lang="fr-FR"/>
               <a:t>Cliquez pour modifier le style du titre</a:t>
             </a:r>
-            <a:endParaRPr lang="fr-FR"/>
           </a:p>
         </p:txBody>
       </p:sp>
@@ -1093,38 +1086,37 @@
           <a:p>
             <a:pPr lvl="0"/>
             <a:r>
-              <a:rPr lang="fr-FR" smtClean="0"/>
+              <a:rPr lang="fr-FR"/>
               <a:t>Cliquez pour modifier les styles du texte du masque</a:t>
             </a:r>
           </a:p>
           <a:p>
             <a:pPr lvl="1"/>
             <a:r>
-              <a:rPr lang="fr-FR" smtClean="0"/>
+              <a:rPr lang="fr-FR"/>
               <a:t>Deuxième niveau</a:t>
             </a:r>
           </a:p>
           <a:p>
             <a:pPr lvl="2"/>
             <a:r>
-              <a:rPr lang="fr-FR" smtClean="0"/>
+              <a:rPr lang="fr-FR"/>
               <a:t>Troisième niveau</a:t>
             </a:r>
           </a:p>
           <a:p>
             <a:pPr lvl="3"/>
             <a:r>
-              <a:rPr lang="fr-FR" smtClean="0"/>
+              <a:rPr lang="fr-FR"/>
               <a:t>Quatrième niveau</a:t>
             </a:r>
           </a:p>
           <a:p>
             <a:pPr lvl="4"/>
             <a:r>
-              <a:rPr lang="fr-FR" smtClean="0"/>
+              <a:rPr lang="fr-FR"/>
               <a:t>Cinquième niveau</a:t>
             </a:r>
-            <a:endParaRPr lang="fr-FR"/>
           </a:p>
         </p:txBody>
       </p:sp>
@@ -1183,10 +1175,9 @@
           </a:lstStyle>
           <a:p>
             <a:r>
-              <a:rPr lang="fr-FR" dirty="0" smtClean="0"/>
+              <a:rPr lang="fr-FR" dirty="0"/>
               <a:t>Cliquez pour modifier le style du titre</a:t>
             </a:r>
-            <a:endParaRPr lang="fr-FR" dirty="0"/>
           </a:p>
         </p:txBody>
       </p:sp>
@@ -1212,38 +1203,37 @@
           <a:p>
             <a:pPr lvl="0"/>
             <a:r>
-              <a:rPr lang="fr-FR" dirty="0" smtClean="0"/>
+              <a:rPr lang="fr-FR" dirty="0"/>
               <a:t>Cliquez pour modifier les styles du texte du masque</a:t>
             </a:r>
           </a:p>
           <a:p>
             <a:pPr lvl="1"/>
             <a:r>
-              <a:rPr lang="fr-FR" dirty="0" smtClean="0"/>
+              <a:rPr lang="fr-FR" dirty="0"/>
               <a:t>Deuxième niveau</a:t>
             </a:r>
           </a:p>
           <a:p>
             <a:pPr lvl="2"/>
             <a:r>
-              <a:rPr lang="fr-FR" dirty="0" smtClean="0"/>
+              <a:rPr lang="fr-FR" dirty="0"/>
               <a:t>Troisième niveau</a:t>
             </a:r>
           </a:p>
           <a:p>
             <a:pPr lvl="3"/>
             <a:r>
-              <a:rPr lang="fr-FR" dirty="0" smtClean="0"/>
+              <a:rPr lang="fr-FR" dirty="0"/>
               <a:t>Quatrième niveau</a:t>
             </a:r>
           </a:p>
           <a:p>
             <a:pPr lvl="4"/>
             <a:r>
-              <a:rPr lang="fr-FR" dirty="0" smtClean="0"/>
+              <a:rPr lang="fr-FR" dirty="0"/>
               <a:t>Cinquième niveau</a:t>
             </a:r>
-            <a:endParaRPr lang="fr-FR" dirty="0"/>
           </a:p>
         </p:txBody>
       </p:sp>
@@ -1293,10 +1283,9 @@
           <a:lstStyle/>
           <a:p>
             <a:r>
-              <a:rPr lang="fr-FR" smtClean="0"/>
+              <a:rPr lang="fr-FR"/>
               <a:t>Cliquez pour modifier le style du titre</a:t>
             </a:r>
-            <a:endParaRPr lang="fr-FR"/>
           </a:p>
         </p:txBody>
       </p:sp>
@@ -1350,38 +1339,37 @@
           <a:p>
             <a:pPr lvl="0"/>
             <a:r>
-              <a:rPr lang="fr-FR" smtClean="0"/>
+              <a:rPr lang="fr-FR"/>
               <a:t>Cliquez pour modifier les styles du texte du masque</a:t>
             </a:r>
           </a:p>
           <a:p>
             <a:pPr lvl="1"/>
             <a:r>
-              <a:rPr lang="fr-FR" smtClean="0"/>
+              <a:rPr lang="fr-FR"/>
               <a:t>Deuxième niveau</a:t>
             </a:r>
           </a:p>
           <a:p>
             <a:pPr lvl="2"/>
             <a:r>
-              <a:rPr lang="fr-FR" smtClean="0"/>
+              <a:rPr lang="fr-FR"/>
               <a:t>Troisième niveau</a:t>
             </a:r>
           </a:p>
           <a:p>
             <a:pPr lvl="3"/>
             <a:r>
-              <a:rPr lang="fr-FR" smtClean="0"/>
+              <a:rPr lang="fr-FR"/>
               <a:t>Quatrième niveau</a:t>
             </a:r>
           </a:p>
           <a:p>
             <a:pPr lvl="4"/>
             <a:r>
-              <a:rPr lang="fr-FR" smtClean="0"/>
+              <a:rPr lang="fr-FR"/>
               <a:t>Cinquième niveau</a:t>
             </a:r>
-            <a:endParaRPr lang="fr-FR"/>
           </a:p>
         </p:txBody>
       </p:sp>
@@ -1435,38 +1423,37 @@
           <a:p>
             <a:pPr lvl="0"/>
             <a:r>
-              <a:rPr lang="fr-FR" smtClean="0"/>
+              <a:rPr lang="fr-FR"/>
               <a:t>Cliquez pour modifier les styles du texte du masque</a:t>
             </a:r>
           </a:p>
           <a:p>
             <a:pPr lvl="1"/>
             <a:r>
-              <a:rPr lang="fr-FR" smtClean="0"/>
+              <a:rPr lang="fr-FR"/>
               <a:t>Deuxième niveau</a:t>
             </a:r>
           </a:p>
           <a:p>
             <a:pPr lvl="2"/>
             <a:r>
-              <a:rPr lang="fr-FR" smtClean="0"/>
+              <a:rPr lang="fr-FR"/>
               <a:t>Troisième niveau</a:t>
             </a:r>
           </a:p>
           <a:p>
             <a:pPr lvl="3"/>
             <a:r>
-              <a:rPr lang="fr-FR" smtClean="0"/>
+              <a:rPr lang="fr-FR"/>
               <a:t>Quatrième niveau</a:t>
             </a:r>
           </a:p>
           <a:p>
             <a:pPr lvl="4"/>
             <a:r>
-              <a:rPr lang="fr-FR" smtClean="0"/>
+              <a:rPr lang="fr-FR"/>
               <a:t>Cinquième niveau</a:t>
             </a:r>
-            <a:endParaRPr lang="fr-FR"/>
           </a:p>
         </p:txBody>
       </p:sp>
@@ -1525,10 +1512,9 @@
           </a:lstStyle>
           <a:p>
             <a:r>
-              <a:rPr lang="fr-FR" smtClean="0"/>
+              <a:rPr lang="fr-FR"/>
               <a:t>Cliquez pour modifier le style du titre</a:t>
             </a:r>
-            <a:endParaRPr lang="fr-FR"/>
           </a:p>
         </p:txBody>
       </p:sp>
@@ -1591,7 +1577,7 @@
           <a:p>
             <a:pPr lvl="0"/>
             <a:r>
-              <a:rPr lang="fr-FR" smtClean="0"/>
+              <a:rPr lang="fr-FR"/>
               <a:t>Cliquez pour modifier les styles du texte du masque</a:t>
             </a:r>
           </a:p>
@@ -1647,38 +1633,37 @@
           <a:p>
             <a:pPr lvl="0"/>
             <a:r>
-              <a:rPr lang="fr-FR" smtClean="0"/>
+              <a:rPr lang="fr-FR"/>
               <a:t>Cliquez pour modifier les styles du texte du masque</a:t>
             </a:r>
           </a:p>
           <a:p>
             <a:pPr lvl="1"/>
             <a:r>
-              <a:rPr lang="fr-FR" smtClean="0"/>
+              <a:rPr lang="fr-FR"/>
               <a:t>Deuxième niveau</a:t>
             </a:r>
           </a:p>
           <a:p>
             <a:pPr lvl="2"/>
             <a:r>
-              <a:rPr lang="fr-FR" smtClean="0"/>
+              <a:rPr lang="fr-FR"/>
               <a:t>Troisième niveau</a:t>
             </a:r>
           </a:p>
           <a:p>
             <a:pPr lvl="3"/>
             <a:r>
-              <a:rPr lang="fr-FR" smtClean="0"/>
+              <a:rPr lang="fr-FR"/>
               <a:t>Quatrième niveau</a:t>
             </a:r>
           </a:p>
           <a:p>
             <a:pPr lvl="4"/>
             <a:r>
-              <a:rPr lang="fr-FR" smtClean="0"/>
+              <a:rPr lang="fr-FR"/>
               <a:t>Cinquième niveau</a:t>
             </a:r>
-            <a:endParaRPr lang="fr-FR"/>
           </a:p>
         </p:txBody>
       </p:sp>
@@ -1741,7 +1726,7 @@
           <a:p>
             <a:pPr lvl="0"/>
             <a:r>
-              <a:rPr lang="fr-FR" smtClean="0"/>
+              <a:rPr lang="fr-FR"/>
               <a:t>Cliquez pour modifier les styles du texte du masque</a:t>
             </a:r>
           </a:p>
@@ -1797,38 +1782,37 @@
           <a:p>
             <a:pPr lvl="0"/>
             <a:r>
-              <a:rPr lang="fr-FR" smtClean="0"/>
+              <a:rPr lang="fr-FR"/>
               <a:t>Cliquez pour modifier les styles du texte du masque</a:t>
             </a:r>
           </a:p>
           <a:p>
             <a:pPr lvl="1"/>
             <a:r>
-              <a:rPr lang="fr-FR" smtClean="0"/>
+              <a:rPr lang="fr-FR"/>
               <a:t>Deuxième niveau</a:t>
             </a:r>
           </a:p>
           <a:p>
             <a:pPr lvl="2"/>
             <a:r>
-              <a:rPr lang="fr-FR" smtClean="0"/>
+              <a:rPr lang="fr-FR"/>
               <a:t>Troisième niveau</a:t>
             </a:r>
           </a:p>
           <a:p>
             <a:pPr lvl="3"/>
             <a:r>
-              <a:rPr lang="fr-FR" smtClean="0"/>
+              <a:rPr lang="fr-FR"/>
               <a:t>Quatrième niveau</a:t>
             </a:r>
           </a:p>
           <a:p>
             <a:pPr lvl="4"/>
             <a:r>
-              <a:rPr lang="fr-FR" smtClean="0"/>
+              <a:rPr lang="fr-FR"/>
               <a:t>Cinquième niveau</a:t>
             </a:r>
-            <a:endParaRPr lang="fr-FR"/>
           </a:p>
         </p:txBody>
       </p:sp>
@@ -1878,10 +1862,9 @@
           <a:lstStyle/>
           <a:p>
             <a:r>
-              <a:rPr lang="fr-FR" smtClean="0"/>
+              <a:rPr lang="fr-FR"/>
               <a:t>Cliquez pour modifier le style du titre</a:t>
             </a:r>
-            <a:endParaRPr lang="fr-FR"/>
           </a:p>
         </p:txBody>
       </p:sp>
@@ -1970,10 +1953,9 @@
           </a:lstStyle>
           <a:p>
             <a:r>
-              <a:rPr lang="fr-FR" smtClean="0"/>
+              <a:rPr lang="fr-FR"/>
               <a:t>Cliquez pour modifier le style du titre</a:t>
             </a:r>
-            <a:endParaRPr lang="fr-FR"/>
           </a:p>
         </p:txBody>
       </p:sp>
@@ -2027,38 +2009,37 @@
           <a:p>
             <a:pPr lvl="0"/>
             <a:r>
-              <a:rPr lang="fr-FR" smtClean="0"/>
+              <a:rPr lang="fr-FR"/>
               <a:t>Cliquez pour modifier les styles du texte du masque</a:t>
             </a:r>
           </a:p>
           <a:p>
             <a:pPr lvl="1"/>
             <a:r>
-              <a:rPr lang="fr-FR" smtClean="0"/>
+              <a:rPr lang="fr-FR"/>
               <a:t>Deuxième niveau</a:t>
             </a:r>
           </a:p>
           <a:p>
             <a:pPr lvl="2"/>
             <a:r>
-              <a:rPr lang="fr-FR" smtClean="0"/>
+              <a:rPr lang="fr-FR"/>
               <a:t>Troisième niveau</a:t>
             </a:r>
           </a:p>
           <a:p>
             <a:pPr lvl="3"/>
             <a:r>
-              <a:rPr lang="fr-FR" smtClean="0"/>
+              <a:rPr lang="fr-FR"/>
               <a:t>Quatrième niveau</a:t>
             </a:r>
           </a:p>
           <a:p>
             <a:pPr lvl="4"/>
             <a:r>
-              <a:rPr lang="fr-FR" smtClean="0"/>
+              <a:rPr lang="fr-FR"/>
               <a:t>Cinquième niveau</a:t>
             </a:r>
-            <a:endParaRPr lang="fr-FR"/>
           </a:p>
         </p:txBody>
       </p:sp>
@@ -2121,7 +2102,7 @@
           <a:p>
             <a:pPr lvl="0"/>
             <a:r>
-              <a:rPr lang="fr-FR" smtClean="0"/>
+              <a:rPr lang="fr-FR"/>
               <a:t>Cliquez pour modifier les styles du texte du masque</a:t>
             </a:r>
           </a:p>
@@ -2182,10 +2163,9 @@
           </a:lstStyle>
           <a:p>
             <a:r>
-              <a:rPr lang="fr-FR" smtClean="0"/>
+              <a:rPr lang="fr-FR"/>
               <a:t>Cliquez pour modifier le style du titre</a:t>
             </a:r>
-            <a:endParaRPr lang="fr-FR"/>
           </a:p>
         </p:txBody>
       </p:sp>
@@ -2247,7 +2227,7 @@
           </a:lstStyle>
           <a:p>
             <a:pPr lvl="0"/>
-            <a:endParaRPr lang="fr-FR" noProof="0" smtClean="0"/>
+            <a:endParaRPr lang="fr-FR" noProof="0"/>
           </a:p>
         </p:txBody>
       </p:sp>
@@ -2310,7 +2290,7 @@
           <a:p>
             <a:pPr lvl="0"/>
             <a:r>
-              <a:rPr lang="fr-FR" smtClean="0"/>
+              <a:rPr lang="fr-FR"/>
               <a:t>Cliquez pour modifier les styles du texte du masque</a:t>
             </a:r>
           </a:p>
@@ -2362,10 +2342,9 @@
           <a:lstStyle/>
           <a:p>
             <a:r>
-              <a:rPr lang="fr-FR" smtClean="0"/>
+              <a:rPr lang="fr-FR"/>
               <a:t>Cliquez pour modifier le style du titre</a:t>
             </a:r>
-            <a:endParaRPr lang="fr-FR"/>
           </a:p>
         </p:txBody>
       </p:sp>
@@ -2386,38 +2365,37 @@
           <a:p>
             <a:pPr lvl="0"/>
             <a:r>
-              <a:rPr lang="fr-FR" smtClean="0"/>
+              <a:rPr lang="fr-FR"/>
               <a:t>Cliquez pour modifier les styles du texte du masque</a:t>
             </a:r>
           </a:p>
           <a:p>
             <a:pPr lvl="1"/>
             <a:r>
-              <a:rPr lang="fr-FR" smtClean="0"/>
+              <a:rPr lang="fr-FR"/>
               <a:t>Deuxième niveau</a:t>
             </a:r>
           </a:p>
           <a:p>
             <a:pPr lvl="2"/>
             <a:r>
-              <a:rPr lang="fr-FR" smtClean="0"/>
+              <a:rPr lang="fr-FR"/>
               <a:t>Troisième niveau</a:t>
             </a:r>
           </a:p>
           <a:p>
             <a:pPr lvl="3"/>
             <a:r>
-              <a:rPr lang="fr-FR" smtClean="0"/>
+              <a:rPr lang="fr-FR"/>
               <a:t>Quatrième niveau</a:t>
             </a:r>
           </a:p>
           <a:p>
             <a:pPr lvl="4"/>
             <a:r>
-              <a:rPr lang="fr-FR" smtClean="0"/>
+              <a:rPr lang="fr-FR"/>
               <a:t>Cinquième niveau</a:t>
             </a:r>
-            <a:endParaRPr lang="fr-FR"/>
           </a:p>
         </p:txBody>
       </p:sp>
@@ -2598,7 +2576,7 @@
             <a:pPr eaLnBrk="1" hangingPunct="1">
               <a:defRPr/>
             </a:pPr>
-            <a:endParaRPr lang="fr-FR" altLang="fr-FR" smtClean="0"/>
+            <a:endParaRPr lang="fr-FR" altLang="fr-FR"/>
           </a:p>
         </p:txBody>
       </p:sp>
@@ -2752,7 +2730,7 @@
               <a:defRPr/>
             </a:pPr>
             <a:r>
-              <a:rPr lang="fr-FR" sz="1200" dirty="0" smtClean="0"/>
+              <a:rPr lang="fr-FR" sz="1200" dirty="0"/>
               <a:t>Page </a:t>
             </a:r>
             <a:fld id="{E218E9B1-FD08-4C80-902E-210BA2967D0D}" type="slidenum">
@@ -2765,7 +2743,7 @@
               </a:pPr>
               <a:t>‹N°›</a:t>
             </a:fld>
-            <a:endParaRPr lang="fr-FR" dirty="0" smtClean="0">
+            <a:endParaRPr lang="fr-FR" dirty="0">
               <a:latin typeface="Times New Roman" pitchFamily="18" charset="0"/>
             </a:endParaRPr>
           </a:p>
@@ -2921,10 +2899,10 @@
               <a:defRPr/>
             </a:pPr>
             <a:r>
-              <a:rPr lang="fr-FR" sz="1600" dirty="0" smtClean="0"/>
+              <a:rPr lang="fr-FR" sz="1600" dirty="0"/>
               <a:t>Python</a:t>
             </a:r>
-            <a:endParaRPr lang="fr-FR" dirty="0" smtClean="0">
+            <a:endParaRPr lang="fr-FR" dirty="0">
               <a:latin typeface="Times New Roman" pitchFamily="18" charset="0"/>
             </a:endParaRPr>
           </a:p>
@@ -2982,7 +2960,7 @@
           <a:p>
             <a:pPr lvl="0"/>
             <a:r>
-              <a:rPr lang="fr-FR" altLang="fr-FR" smtClean="0"/>
+              <a:rPr lang="fr-FR" altLang="fr-FR"/>
               <a:t>Cliquez pour modifier le style du titre du masque</a:t>
             </a:r>
           </a:p>
@@ -3040,35 +3018,35 @@
           <a:p>
             <a:pPr lvl="0"/>
             <a:r>
-              <a:rPr lang="fr-FR" altLang="fr-FR" smtClean="0"/>
+              <a:rPr lang="fr-FR" altLang="fr-FR"/>
               <a:t>Cliquez pour modifier les styles du texte du masque</a:t>
             </a:r>
           </a:p>
           <a:p>
             <a:pPr lvl="1"/>
             <a:r>
-              <a:rPr lang="fr-FR" altLang="fr-FR" smtClean="0"/>
+              <a:rPr lang="fr-FR" altLang="fr-FR"/>
               <a:t>Deuxième niveau</a:t>
             </a:r>
           </a:p>
           <a:p>
             <a:pPr lvl="2"/>
             <a:r>
-              <a:rPr lang="fr-FR" altLang="fr-FR" smtClean="0"/>
+              <a:rPr lang="fr-FR" altLang="fr-FR"/>
               <a:t>Troisième niveau</a:t>
             </a:r>
           </a:p>
           <a:p>
             <a:pPr lvl="3"/>
             <a:r>
-              <a:rPr lang="fr-FR" altLang="fr-FR" smtClean="0"/>
+              <a:rPr lang="fr-FR" altLang="fr-FR"/>
               <a:t>Quatrième niveau</a:t>
             </a:r>
           </a:p>
           <a:p>
             <a:pPr lvl="4"/>
             <a:r>
-              <a:rPr lang="fr-FR" altLang="fr-FR" smtClean="0"/>
+              <a:rPr lang="fr-FR" altLang="fr-FR"/>
               <a:t>Cinquième niveau</a:t>
             </a:r>
           </a:p>
@@ -3224,10 +3202,10 @@
               <a:defRPr/>
             </a:pPr>
             <a:r>
-              <a:rPr lang="fr-FR" sz="1200" smtClean="0"/>
+              <a:rPr lang="fr-FR" sz="1200"/>
               <a:t>© Cyril Vincent Conseil</a:t>
             </a:r>
-            <a:endParaRPr lang="fr-FR" smtClean="0">
+            <a:endParaRPr lang="fr-FR">
               <a:latin typeface="Times New Roman" pitchFamily="18" charset="0"/>
             </a:endParaRPr>
           </a:p>
@@ -3709,17 +3687,17 @@
           <a:p>
             <a:pPr eaLnBrk="1" hangingPunct="1"/>
             <a:r>
-              <a:rPr lang="fr-FR" altLang="fr-FR" dirty="0" smtClean="0"/>
+              <a:rPr lang="fr-FR" altLang="fr-FR" dirty="0"/>
               <a:t>Chapitre 6</a:t>
             </a:r>
           </a:p>
           <a:p>
             <a:pPr eaLnBrk="1" hangingPunct="1"/>
             <a:r>
-              <a:rPr lang="fr-FR" altLang="fr-FR" dirty="0" err="1" smtClean="0"/>
+              <a:rPr lang="fr-FR" altLang="fr-FR" dirty="0" err="1"/>
               <a:t>Numpy</a:t>
             </a:r>
-            <a:endParaRPr lang="fr-FR" altLang="fr-FR" dirty="0" smtClean="0"/>
+            <a:endParaRPr lang="fr-FR" altLang="fr-FR" dirty="0"/>
           </a:p>
         </p:txBody>
       </p:sp>
@@ -3789,692 +3767,10 @@
   <p:clrMapOvr>
     <a:masterClrMapping/>
   </p:clrMapOvr>
-  <p:timing>
-    <p:tnLst>
-      <p:par>
-        <p:cTn id="1" dur="indefinite" restart="never" nodeType="tmRoot"/>
-      </p:par>
-    </p:tnLst>
-  </p:timing>
 </p:sld>
 </file>
 
 <file path=ppt/slides/slide10.xml><?xml version="1.0" encoding="utf-8"?>
-<p:sld xmlns:a="http://schemas.openxmlformats.org/drawingml/2006/main" xmlns:r="http://schemas.openxmlformats.org/officeDocument/2006/relationships" xmlns:p="http://schemas.openxmlformats.org/presentationml/2006/main">
-  <p:cSld>
-    <p:spTree>
-      <p:nvGrpSpPr>
-        <p:cNvPr id="1" name=""/>
-        <p:cNvGrpSpPr/>
-        <p:nvPr/>
-      </p:nvGrpSpPr>
-      <p:grpSpPr>
-        <a:xfrm>
-          <a:off x="0" y="0"/>
-          <a:ext cx="0" cy="0"/>
-          <a:chOff x="0" y="0"/>
-          <a:chExt cx="0" cy="0"/>
-        </a:xfrm>
-      </p:grpSpPr>
-      <p:sp>
-        <p:nvSpPr>
-          <p:cNvPr id="2" name="Title 1">
-            <a:extLst>
-              <a:ext uri="{FF2B5EF4-FFF2-40B4-BE49-F238E27FC236}">
-                <a16:creationId xmlns:a16="http://schemas.microsoft.com/office/drawing/2014/main" id="{F8C3A89D-B04F-4FF7-B864-B3F9BBFBE530}"/>
-              </a:ext>
-            </a:extLst>
-          </p:cNvPr>
-          <p:cNvSpPr>
-            <a:spLocks noGrp="1"/>
-          </p:cNvSpPr>
-          <p:nvPr>
-            <p:ph type="title"/>
-          </p:nvPr>
-        </p:nvSpPr>
-        <p:spPr/>
-        <p:txBody>
-          <a:bodyPr/>
-          <a:lstStyle/>
-          <a:p>
-            <a:r>
-              <a:rPr lang="en-US" dirty="0"/>
-              <a:t>Arrays, creation</a:t>
-            </a:r>
-          </a:p>
-        </p:txBody>
-      </p:sp>
-      <p:sp>
-        <p:nvSpPr>
-          <p:cNvPr id="3" name="Content Placeholder 2">
-            <a:extLst>
-              <a:ext uri="{FF2B5EF4-FFF2-40B4-BE49-F238E27FC236}">
-                <a16:creationId xmlns:a16="http://schemas.microsoft.com/office/drawing/2014/main" id="{E06060F4-F2F0-4A93-BA3A-8F21AA583A86}"/>
-              </a:ext>
-            </a:extLst>
-          </p:cNvPr>
-          <p:cNvSpPr>
-            <a:spLocks noGrp="1"/>
-          </p:cNvSpPr>
-          <p:nvPr>
-            <p:ph sz="half" idx="1"/>
-          </p:nvPr>
-        </p:nvSpPr>
-        <p:spPr/>
-        <p:txBody>
-          <a:bodyPr/>
-          <a:lstStyle/>
-          <a:p>
-            <a:r>
-              <a:rPr lang="en-US" dirty="0" err="1"/>
-              <a:t>np.ones</a:t>
-            </a:r>
-            <a:r>
-              <a:rPr lang="en-US" dirty="0"/>
-              <a:t>, </a:t>
-            </a:r>
-            <a:r>
-              <a:rPr lang="en-US" dirty="0" err="1"/>
-              <a:t>np.zeros</a:t>
-            </a:r>
-            <a:endParaRPr lang="en-US" dirty="0"/>
-          </a:p>
-          <a:p>
-            <a:r>
-              <a:rPr lang="en-US" dirty="0" err="1"/>
-              <a:t>np.arange</a:t>
-            </a:r>
-            <a:endParaRPr lang="en-US" dirty="0"/>
-          </a:p>
-          <a:p>
-            <a:r>
-              <a:rPr lang="en-US" dirty="0" err="1"/>
-              <a:t>np.concatenate</a:t>
-            </a:r>
-            <a:endParaRPr lang="en-US" dirty="0"/>
-          </a:p>
-          <a:p>
-            <a:r>
-              <a:rPr lang="en-US" dirty="0" err="1"/>
-              <a:t>np.astype</a:t>
-            </a:r>
-            <a:endParaRPr lang="en-US" dirty="0"/>
-          </a:p>
-          <a:p>
-            <a:r>
-              <a:rPr lang="en-US" b="1" dirty="0" err="1"/>
-              <a:t>np.zeros_like</a:t>
-            </a:r>
-            <a:r>
-              <a:rPr lang="en-US" b="1" dirty="0"/>
-              <a:t>, </a:t>
-            </a:r>
-            <a:r>
-              <a:rPr lang="en-US" b="1" dirty="0" err="1"/>
-              <a:t>np.ones_like</a:t>
-            </a:r>
-            <a:endParaRPr lang="en-US" b="1" dirty="0"/>
-          </a:p>
-          <a:p>
-            <a:r>
-              <a:rPr lang="en-US" dirty="0" err="1"/>
-              <a:t>np.random.random</a:t>
-            </a:r>
-            <a:endParaRPr lang="en-US" dirty="0"/>
-          </a:p>
-        </p:txBody>
-      </p:sp>
-      <p:sp>
-        <p:nvSpPr>
-          <p:cNvPr id="4" name="Slide Number Placeholder 3">
-            <a:extLst>
-              <a:ext uri="{FF2B5EF4-FFF2-40B4-BE49-F238E27FC236}">
-                <a16:creationId xmlns:a16="http://schemas.microsoft.com/office/drawing/2014/main" id="{477EE54A-B5E2-4DA9-952D-ABF5FCAC46C8}"/>
-              </a:ext>
-            </a:extLst>
-          </p:cNvPr>
-          <p:cNvSpPr>
-            <a:spLocks noGrp="1"/>
-          </p:cNvSpPr>
-          <p:nvPr>
-            <p:ph type="sldNum" sz="quarter" idx="4294967295"/>
-          </p:nvPr>
-        </p:nvSpPr>
-        <p:spPr/>
-        <p:txBody>
-          <a:bodyPr>
-            <a:normAutofit fontScale="25000" lnSpcReduction="20000"/>
-          </a:bodyPr>
-          <a:lstStyle/>
-          <a:p>
-            <a:fld id="{4FAB73BC-B049-4115-A692-8D63A059BFB8}" type="slidenum">
-              <a:rPr lang="en-US" smtClean="0"/>
-              <a:t>10</a:t>
-            </a:fld>
-            <a:endParaRPr lang="en-US" dirty="0"/>
-          </a:p>
-        </p:txBody>
-      </p:sp>
-      <p:sp>
-        <p:nvSpPr>
-          <p:cNvPr id="6" name="Content Placeholder 5">
-            <a:extLst>
-              <a:ext uri="{FF2B5EF4-FFF2-40B4-BE49-F238E27FC236}">
-                <a16:creationId xmlns:a16="http://schemas.microsoft.com/office/drawing/2014/main" id="{AC91024C-2C0D-4B84-8A32-07E92E289FA4}"/>
-              </a:ext>
-            </a:extLst>
-          </p:cNvPr>
-          <p:cNvSpPr>
-            <a:spLocks noGrp="1"/>
-          </p:cNvSpPr>
-          <p:nvPr>
-            <p:ph sz="half" idx="2"/>
-          </p:nvPr>
-        </p:nvSpPr>
-        <p:spPr/>
-        <p:txBody>
-          <a:bodyPr/>
-          <a:lstStyle/>
-          <a:p>
-            <a:endParaRPr lang="en-US"/>
-          </a:p>
-        </p:txBody>
-      </p:sp>
-      <p:pic>
-        <p:nvPicPr>
-          <p:cNvPr id="3076" name="Picture 4" descr="https://i.gyazo.com/06e91c14aeec5dcf6a8534c1282a5f4a.png">
-            <a:extLst>
-              <a:ext uri="{FF2B5EF4-FFF2-40B4-BE49-F238E27FC236}">
-                <a16:creationId xmlns:a16="http://schemas.microsoft.com/office/drawing/2014/main" id="{41D56FE4-04AA-438C-8631-08EF4969EE61}"/>
-              </a:ext>
-            </a:extLst>
-          </p:cNvPr>
-          <p:cNvPicPr>
-            <a:picLocks noChangeAspect="1" noChangeArrowheads="1"/>
-          </p:cNvPicPr>
-          <p:nvPr/>
-        </p:nvPicPr>
-        <p:blipFill>
-          <a:blip r:embed="rId2">
-            <a:extLst>
-              <a:ext uri="{28A0092B-C50C-407E-A947-70E740481C1C}">
-                <a14:useLocalDpi xmlns:a14="http://schemas.microsoft.com/office/drawing/2010/main" val="0"/>
-              </a:ext>
-            </a:extLst>
-          </a:blip>
-          <a:srcRect/>
-          <a:stretch>
-            <a:fillRect/>
-          </a:stretch>
-        </p:blipFill>
-        <p:spPr bwMode="auto">
-          <a:xfrm>
-            <a:off x="4572000" y="2924944"/>
-            <a:ext cx="3911030" cy="994171"/>
-          </a:xfrm>
-          <a:prstGeom prst="rect">
-            <a:avLst/>
-          </a:prstGeom>
-          <a:noFill/>
-          <a:extLst>
-            <a:ext uri="{909E8E84-426E-40DD-AFC4-6F175D3DCCD1}">
-              <a14:hiddenFill xmlns:a14="http://schemas.microsoft.com/office/drawing/2010/main">
-                <a:solidFill>
-                  <a:srgbClr val="FFFFFF"/>
-                </a:solidFill>
-              </a14:hiddenFill>
-            </a:ext>
-          </a:extLst>
-        </p:spPr>
-      </p:pic>
-    </p:spTree>
-    <p:extLst>
-      <p:ext uri="{BB962C8B-B14F-4D97-AF65-F5344CB8AC3E}">
-        <p14:creationId xmlns:p14="http://schemas.microsoft.com/office/powerpoint/2010/main" val="2006993335"/>
-      </p:ext>
-    </p:extLst>
-  </p:cSld>
-  <p:clrMapOvr>
-    <a:masterClrMapping/>
-  </p:clrMapOvr>
-  <p:timing>
-    <p:tnLst>
-      <p:par>
-        <p:cTn id="1" dur="indefinite" restart="never" nodeType="tmRoot"/>
-      </p:par>
-    </p:tnLst>
-  </p:timing>
-</p:sld>
-</file>
-
-<file path=ppt/slides/slide11.xml><?xml version="1.0" encoding="utf-8"?>
-<p:sld xmlns:a="http://schemas.openxmlformats.org/drawingml/2006/main" xmlns:r="http://schemas.openxmlformats.org/officeDocument/2006/relationships" xmlns:p="http://schemas.openxmlformats.org/presentationml/2006/main">
-  <p:cSld>
-    <p:spTree>
-      <p:nvGrpSpPr>
-        <p:cNvPr id="1" name=""/>
-        <p:cNvGrpSpPr/>
-        <p:nvPr/>
-      </p:nvGrpSpPr>
-      <p:grpSpPr>
-        <a:xfrm>
-          <a:off x="0" y="0"/>
-          <a:ext cx="0" cy="0"/>
-          <a:chOff x="0" y="0"/>
-          <a:chExt cx="0" cy="0"/>
-        </a:xfrm>
-      </p:grpSpPr>
-      <p:sp>
-        <p:nvSpPr>
-          <p:cNvPr id="2" name="Titre 1"/>
-          <p:cNvSpPr>
-            <a:spLocks noGrp="1"/>
-          </p:cNvSpPr>
-          <p:nvPr>
-            <p:ph type="title"/>
-          </p:nvPr>
-        </p:nvSpPr>
-        <p:spPr/>
-        <p:txBody>
-          <a:bodyPr/>
-          <a:lstStyle/>
-          <a:p>
-            <a:r>
-              <a:rPr lang="fr-FR" dirty="0" err="1" smtClean="0"/>
-              <a:t>arange</a:t>
-            </a:r>
-            <a:endParaRPr lang="fr-FR" dirty="0"/>
-          </a:p>
-        </p:txBody>
-      </p:sp>
-      <p:sp>
-        <p:nvSpPr>
-          <p:cNvPr id="3" name="Espace réservé du contenu 2"/>
-          <p:cNvSpPr>
-            <a:spLocks noGrp="1"/>
-          </p:cNvSpPr>
-          <p:nvPr>
-            <p:ph idx="1"/>
-          </p:nvPr>
-        </p:nvSpPr>
-        <p:spPr/>
-        <p:txBody>
-          <a:bodyPr/>
-          <a:lstStyle/>
-          <a:p>
-            <a:r>
-              <a:rPr lang="fr-FR" dirty="0"/>
-              <a:t># Un tableau rempli d'une séquence linéaire</a:t>
-            </a:r>
-          </a:p>
-          <a:p>
-            <a:r>
-              <a:rPr lang="fr-FR" dirty="0"/>
-              <a:t># commençant à 0 et qui se termine à 20, avec un pas de 2</a:t>
-            </a:r>
-          </a:p>
-          <a:p>
-            <a:r>
-              <a:rPr lang="fr-FR" dirty="0" err="1"/>
-              <a:t>np.arange</a:t>
-            </a:r>
-            <a:r>
-              <a:rPr lang="fr-FR" dirty="0"/>
-              <a:t>(0, 20, 2)</a:t>
-            </a:r>
-          </a:p>
-          <a:p>
-            <a:r>
-              <a:rPr lang="fr-FR" dirty="0" smtClean="0"/>
-              <a:t># </a:t>
-            </a:r>
-            <a:r>
-              <a:rPr lang="fr-FR" dirty="0"/>
-              <a:t>Un tableau de 5 valeurs, espacées uniformément entre 0 et 1</a:t>
-            </a:r>
-          </a:p>
-          <a:p>
-            <a:r>
-              <a:rPr lang="fr-FR" dirty="0" err="1"/>
-              <a:t>np.linspace</a:t>
-            </a:r>
-            <a:r>
-              <a:rPr lang="fr-FR" dirty="0"/>
-              <a:t>(0, 1, 5)</a:t>
-            </a:r>
-          </a:p>
-        </p:txBody>
-      </p:sp>
-    </p:spTree>
-    <p:extLst>
-      <p:ext uri="{BB962C8B-B14F-4D97-AF65-F5344CB8AC3E}">
-        <p14:creationId xmlns:p14="http://schemas.microsoft.com/office/powerpoint/2010/main" val="3214626482"/>
-      </p:ext>
-    </p:extLst>
-  </p:cSld>
-  <p:clrMapOvr>
-    <a:masterClrMapping/>
-  </p:clrMapOvr>
-  <p:timing>
-    <p:tnLst>
-      <p:par>
-        <p:cTn id="1" dur="indefinite" restart="never" nodeType="tmRoot"/>
-      </p:par>
-    </p:tnLst>
-  </p:timing>
-</p:sld>
-</file>
-
-<file path=ppt/slides/slide12.xml><?xml version="1.0" encoding="utf-8"?>
-<p:sld xmlns:a="http://schemas.openxmlformats.org/drawingml/2006/main" xmlns:r="http://schemas.openxmlformats.org/officeDocument/2006/relationships" xmlns:p="http://schemas.openxmlformats.org/presentationml/2006/main">
-  <p:cSld>
-    <p:spTree>
-      <p:nvGrpSpPr>
-        <p:cNvPr id="1" name=""/>
-        <p:cNvGrpSpPr/>
-        <p:nvPr/>
-      </p:nvGrpSpPr>
-      <p:grpSpPr>
-        <a:xfrm>
-          <a:off x="0" y="0"/>
-          <a:ext cx="0" cy="0"/>
-          <a:chOff x="0" y="0"/>
-          <a:chExt cx="0" cy="0"/>
-        </a:xfrm>
-      </p:grpSpPr>
-      <p:sp>
-        <p:nvSpPr>
-          <p:cNvPr id="2" name="Title 1">
-            <a:extLst>
-              <a:ext uri="{FF2B5EF4-FFF2-40B4-BE49-F238E27FC236}">
-                <a16:creationId xmlns:a16="http://schemas.microsoft.com/office/drawing/2014/main" id="{F8C3A89D-B04F-4FF7-B864-B3F9BBFBE530}"/>
-              </a:ext>
-            </a:extLst>
-          </p:cNvPr>
-          <p:cNvSpPr>
-            <a:spLocks noGrp="1"/>
-          </p:cNvSpPr>
-          <p:nvPr>
-            <p:ph type="title"/>
-          </p:nvPr>
-        </p:nvSpPr>
-        <p:spPr/>
-        <p:txBody>
-          <a:bodyPr/>
-          <a:lstStyle/>
-          <a:p>
-            <a:r>
-              <a:rPr lang="en-US" dirty="0"/>
-              <a:t>Arrays, creation</a:t>
-            </a:r>
-          </a:p>
-        </p:txBody>
-      </p:sp>
-      <p:sp>
-        <p:nvSpPr>
-          <p:cNvPr id="3" name="Content Placeholder 2">
-            <a:extLst>
-              <a:ext uri="{FF2B5EF4-FFF2-40B4-BE49-F238E27FC236}">
-                <a16:creationId xmlns:a16="http://schemas.microsoft.com/office/drawing/2014/main" id="{E06060F4-F2F0-4A93-BA3A-8F21AA583A86}"/>
-              </a:ext>
-            </a:extLst>
-          </p:cNvPr>
-          <p:cNvSpPr>
-            <a:spLocks noGrp="1"/>
-          </p:cNvSpPr>
-          <p:nvPr>
-            <p:ph sz="half" idx="1"/>
-          </p:nvPr>
-        </p:nvSpPr>
-        <p:spPr/>
-        <p:txBody>
-          <a:bodyPr/>
-          <a:lstStyle/>
-          <a:p>
-            <a:r>
-              <a:rPr lang="en-US" dirty="0" err="1"/>
-              <a:t>np.ones</a:t>
-            </a:r>
-            <a:r>
-              <a:rPr lang="en-US" dirty="0"/>
-              <a:t>, </a:t>
-            </a:r>
-            <a:r>
-              <a:rPr lang="en-US" dirty="0" err="1"/>
-              <a:t>np.zeros</a:t>
-            </a:r>
-            <a:endParaRPr lang="en-US" dirty="0"/>
-          </a:p>
-          <a:p>
-            <a:r>
-              <a:rPr lang="en-US" b="1" dirty="0" err="1"/>
-              <a:t>np.arange</a:t>
-            </a:r>
-            <a:endParaRPr lang="en-US" b="1" dirty="0"/>
-          </a:p>
-          <a:p>
-            <a:r>
-              <a:rPr lang="en-US" dirty="0" err="1"/>
-              <a:t>np.concatenate</a:t>
-            </a:r>
-            <a:endParaRPr lang="en-US" dirty="0"/>
-          </a:p>
-          <a:p>
-            <a:r>
-              <a:rPr lang="en-US" dirty="0" err="1"/>
-              <a:t>np.astype</a:t>
-            </a:r>
-            <a:endParaRPr lang="en-US" dirty="0"/>
-          </a:p>
-          <a:p>
-            <a:r>
-              <a:rPr lang="en-US" dirty="0" err="1"/>
-              <a:t>np.zeros_like</a:t>
-            </a:r>
-            <a:r>
-              <a:rPr lang="en-US" dirty="0"/>
-              <a:t>, </a:t>
-            </a:r>
-            <a:r>
-              <a:rPr lang="en-US" dirty="0" err="1"/>
-              <a:t>np.ones_like</a:t>
-            </a:r>
-            <a:endParaRPr lang="en-US" dirty="0"/>
-          </a:p>
-          <a:p>
-            <a:r>
-              <a:rPr lang="en-US" dirty="0" err="1"/>
-              <a:t>np.random.random</a:t>
-            </a:r>
-            <a:endParaRPr lang="en-US" dirty="0"/>
-          </a:p>
-        </p:txBody>
-      </p:sp>
-      <p:pic>
-        <p:nvPicPr>
-          <p:cNvPr id="3076" name="Picture 4" descr="https://i.gyazo.com/8001a5fae4b908ca4cdec3a018885ba7.png">
-            <a:extLst>
-              <a:ext uri="{FF2B5EF4-FFF2-40B4-BE49-F238E27FC236}">
-                <a16:creationId xmlns:a16="http://schemas.microsoft.com/office/drawing/2014/main" id="{F932B43B-F42C-4E3D-8306-84FD7EA80D09}"/>
-              </a:ext>
-            </a:extLst>
-          </p:cNvPr>
-          <p:cNvPicPr>
-            <a:picLocks noGrp="1" noChangeAspect="1" noChangeArrowheads="1"/>
-          </p:cNvPicPr>
-          <p:nvPr>
-            <p:ph sz="half" idx="2"/>
-          </p:nvPr>
-        </p:nvPicPr>
-        <p:blipFill>
-          <a:blip r:embed="rId2">
-            <a:extLst>
-              <a:ext uri="{28A0092B-C50C-407E-A947-70E740481C1C}">
-                <a14:useLocalDpi xmlns:a14="http://schemas.microsoft.com/office/drawing/2010/main" val="0"/>
-              </a:ext>
-            </a:extLst>
-          </a:blip>
-          <a:srcRect/>
-          <a:stretch>
-            <a:fillRect/>
-          </a:stretch>
-        </p:blipFill>
-        <p:spPr bwMode="auto">
-          <a:xfrm>
-            <a:off x="4061748" y="3573016"/>
-            <a:ext cx="4858985" cy="719166"/>
-          </a:xfrm>
-          <a:prstGeom prst="rect">
-            <a:avLst/>
-          </a:prstGeom>
-          <a:noFill/>
-          <a:extLst>
-            <a:ext uri="{909E8E84-426E-40DD-AFC4-6F175D3DCCD1}">
-              <a14:hiddenFill xmlns:a14="http://schemas.microsoft.com/office/drawing/2010/main">
-                <a:solidFill>
-                  <a:srgbClr val="FFFFFF"/>
-                </a:solidFill>
-              </a14:hiddenFill>
-            </a:ext>
-          </a:extLst>
-        </p:spPr>
-      </p:pic>
-      <p:sp>
-        <p:nvSpPr>
-          <p:cNvPr id="4" name="Slide Number Placeholder 3">
-            <a:extLst>
-              <a:ext uri="{FF2B5EF4-FFF2-40B4-BE49-F238E27FC236}">
-                <a16:creationId xmlns:a16="http://schemas.microsoft.com/office/drawing/2014/main" id="{0F3EFB67-0BB7-4EE7-8621-91042C112821}"/>
-              </a:ext>
-            </a:extLst>
-          </p:cNvPr>
-          <p:cNvSpPr>
-            <a:spLocks noGrp="1"/>
-          </p:cNvSpPr>
-          <p:nvPr>
-            <p:ph type="sldNum" sz="quarter" idx="4294967295"/>
-          </p:nvPr>
-        </p:nvSpPr>
-        <p:spPr/>
-        <p:txBody>
-          <a:bodyPr>
-            <a:normAutofit fontScale="25000" lnSpcReduction="20000"/>
-          </a:bodyPr>
-          <a:lstStyle/>
-          <a:p>
-            <a:fld id="{4FAB73BC-B049-4115-A692-8D63A059BFB8}" type="slidenum">
-              <a:rPr lang="en-US" smtClean="0"/>
-              <a:t>12</a:t>
-            </a:fld>
-            <a:endParaRPr lang="en-US" dirty="0"/>
-          </a:p>
-        </p:txBody>
-      </p:sp>
-    </p:spTree>
-    <p:extLst>
-      <p:ext uri="{BB962C8B-B14F-4D97-AF65-F5344CB8AC3E}">
-        <p14:creationId xmlns:p14="http://schemas.microsoft.com/office/powerpoint/2010/main" val="636031390"/>
-      </p:ext>
-    </p:extLst>
-  </p:cSld>
-  <p:clrMapOvr>
-    <a:masterClrMapping/>
-  </p:clrMapOvr>
-  <p:timing>
-    <p:tnLst>
-      <p:par>
-        <p:cTn id="1" dur="indefinite" restart="never" nodeType="tmRoot"/>
-      </p:par>
-    </p:tnLst>
-  </p:timing>
-</p:sld>
-</file>
-
-<file path=ppt/slides/slide13.xml><?xml version="1.0" encoding="utf-8"?>
-<p:sld xmlns:a="http://schemas.openxmlformats.org/drawingml/2006/main" xmlns:r="http://schemas.openxmlformats.org/officeDocument/2006/relationships" xmlns:p="http://schemas.openxmlformats.org/presentationml/2006/main">
-  <p:cSld>
-    <p:spTree>
-      <p:nvGrpSpPr>
-        <p:cNvPr id="1" name=""/>
-        <p:cNvGrpSpPr/>
-        <p:nvPr/>
-      </p:nvGrpSpPr>
-      <p:grpSpPr>
-        <a:xfrm>
-          <a:off x="0" y="0"/>
-          <a:ext cx="0" cy="0"/>
-          <a:chOff x="0" y="0"/>
-          <a:chExt cx="0" cy="0"/>
-        </a:xfrm>
-      </p:grpSpPr>
-      <p:sp>
-        <p:nvSpPr>
-          <p:cNvPr id="2" name="Titre 1"/>
-          <p:cNvSpPr>
-            <a:spLocks noGrp="1"/>
-          </p:cNvSpPr>
-          <p:nvPr>
-            <p:ph type="title"/>
-          </p:nvPr>
-        </p:nvSpPr>
-        <p:spPr/>
-        <p:txBody>
-          <a:bodyPr/>
-          <a:lstStyle/>
-          <a:p>
-            <a:r>
-              <a:rPr lang="fr-FR" dirty="0" err="1" smtClean="0"/>
-              <a:t>Random</a:t>
-            </a:r>
-            <a:endParaRPr lang="fr-FR" dirty="0"/>
-          </a:p>
-        </p:txBody>
-      </p:sp>
-      <p:pic>
-        <p:nvPicPr>
-          <p:cNvPr id="4" name="Image 3"/>
-          <p:cNvPicPr>
-            <a:picLocks noChangeAspect="1"/>
-          </p:cNvPicPr>
-          <p:nvPr/>
-        </p:nvPicPr>
-        <p:blipFill>
-          <a:blip r:embed="rId2"/>
-          <a:stretch>
-            <a:fillRect/>
-          </a:stretch>
-        </p:blipFill>
-        <p:spPr>
-          <a:xfrm>
-            <a:off x="827584" y="1156209"/>
-            <a:ext cx="7466207" cy="3744416"/>
-          </a:xfrm>
-          <a:prstGeom prst="rect">
-            <a:avLst/>
-          </a:prstGeom>
-        </p:spPr>
-      </p:pic>
-    </p:spTree>
-    <p:extLst>
-      <p:ext uri="{BB962C8B-B14F-4D97-AF65-F5344CB8AC3E}">
-        <p14:creationId xmlns:p14="http://schemas.microsoft.com/office/powerpoint/2010/main" val="2677605873"/>
-      </p:ext>
-    </p:extLst>
-  </p:cSld>
-  <p:clrMapOvr>
-    <a:masterClrMapping/>
-  </p:clrMapOvr>
-  <p:timing>
-    <p:tnLst>
-      <p:par>
-        <p:cTn id="1" dur="indefinite" restart="never" nodeType="tmRoot"/>
-      </p:par>
-    </p:tnLst>
-  </p:timing>
-</p:sld>
-</file>
-
-<file path=ppt/slides/slide14.xml><?xml version="1.0" encoding="utf-8"?>
 <p:sld xmlns:a="http://schemas.openxmlformats.org/drawingml/2006/main" xmlns:r="http://schemas.openxmlformats.org/officeDocument/2006/relationships" xmlns:p="http://schemas.openxmlformats.org/presentationml/2006/main">
   <p:cSld>
     <p:spTree>
@@ -4673,7 +3969,7 @@
           <a:p>
             <a:fld id="{4FAB73BC-B049-4115-A692-8D63A059BFB8}" type="slidenum">
               <a:rPr lang="en-US" smtClean="0"/>
-              <a:t>14</a:t>
+              <a:t>10</a:t>
             </a:fld>
             <a:endParaRPr lang="en-US" dirty="0"/>
           </a:p>
@@ -4689,17 +3985,10 @@
   <p:clrMapOvr>
     <a:masterClrMapping/>
   </p:clrMapOvr>
-  <p:timing>
-    <p:tnLst>
-      <p:par>
-        <p:cTn id="1" dur="indefinite" restart="never" nodeType="tmRoot"/>
-      </p:par>
-    </p:tnLst>
-  </p:timing>
 </p:sld>
 </file>
 
-<file path=ppt/slides/slide15.xml><?xml version="1.0" encoding="utf-8"?>
+<file path=ppt/slides/slide11.xml><?xml version="1.0" encoding="utf-8"?>
 <p:sld xmlns:a="http://schemas.openxmlformats.org/drawingml/2006/main" xmlns:r="http://schemas.openxmlformats.org/officeDocument/2006/relationships" xmlns:p="http://schemas.openxmlformats.org/presentationml/2006/main">
   <p:cSld>
     <p:spTree>
@@ -4766,40 +4055,38 @@
           <a:lstStyle/>
           <a:p>
             <a:r>
-              <a:rPr lang="en-US" dirty="0" smtClean="0"/>
+              <a:rPr lang="en-US" dirty="0"/>
               <a:t>Pas de </a:t>
             </a:r>
             <a:r>
-              <a:rPr lang="en-US" dirty="0" err="1" smtClean="0"/>
+              <a:rPr lang="en-US" dirty="0" err="1"/>
               <a:t>trou</a:t>
             </a:r>
             <a:endParaRPr lang="en-US" dirty="0"/>
           </a:p>
           <a:p>
             <a:r>
-              <a:rPr lang="en-US" dirty="0" smtClean="0"/>
+              <a:rPr lang="en-US" dirty="0"/>
               <a:t>Un </a:t>
             </a:r>
             <a:r>
-              <a:rPr lang="en-US" dirty="0" err="1" smtClean="0"/>
+              <a:rPr lang="en-US" dirty="0" err="1"/>
               <a:t>seul</a:t>
             </a:r>
             <a:r>
-              <a:rPr lang="en-US" dirty="0" smtClean="0"/>
+              <a:rPr lang="en-US" dirty="0"/>
               <a:t> type</a:t>
             </a:r>
-            <a:endParaRPr lang="en-US" dirty="0"/>
-          </a:p>
-          <a:p>
-            <a:r>
-              <a:rPr lang="en-US" dirty="0" err="1" smtClean="0"/>
+          </a:p>
+          <a:p>
+            <a:r>
+              <a:rPr lang="en-US" dirty="0" err="1"/>
               <a:t>Même</a:t>
             </a:r>
             <a:r>
-              <a:rPr lang="en-US" dirty="0" smtClean="0"/>
+              <a:rPr lang="en-US" dirty="0"/>
               <a:t> dimension</a:t>
             </a:r>
-            <a:endParaRPr lang="en-US" dirty="0"/>
           </a:p>
         </p:txBody>
       </p:sp>
@@ -4828,7 +4115,7 @@
           <a:p>
             <a:fld id="{4FAB73BC-B049-4115-A692-8D63A059BFB8}" type="slidenum">
               <a:rPr lang="en-US" smtClean="0"/>
-              <a:t>15</a:t>
+              <a:t>11</a:t>
             </a:fld>
             <a:endParaRPr lang="en-US" dirty="0"/>
           </a:p>
@@ -4891,17 +4178,10 @@
   <p:clrMapOvr>
     <a:masterClrMapping/>
   </p:clrMapOvr>
-  <p:timing>
-    <p:tnLst>
-      <p:par>
-        <p:cTn id="1" dur="indefinite" restart="never" nodeType="tmRoot"/>
-      </p:par>
-    </p:tnLst>
-  </p:timing>
 </p:sld>
 </file>
 
-<file path=ppt/slides/slide16.xml><?xml version="1.0" encoding="utf-8"?>
+<file path=ppt/slides/slide12.xml><?xml version="1.0" encoding="utf-8"?>
 <p:sld xmlns:a="http://schemas.openxmlformats.org/drawingml/2006/main" xmlns:r="http://schemas.openxmlformats.org/officeDocument/2006/relationships" xmlns:p="http://schemas.openxmlformats.org/presentationml/2006/main">
   <p:cSld>
     <p:spTree>
@@ -4934,33 +4214,33 @@
           <a:lstStyle/>
           <a:p>
             <a:r>
-              <a:rPr lang="fr-FR" dirty="0" smtClean="0"/>
+              <a:rPr lang="fr-FR" dirty="0"/>
               <a:t>Les opérateurs </a:t>
             </a:r>
             <a:r>
-              <a:rPr lang="fr-FR" dirty="0" err="1" smtClean="0"/>
+              <a:rPr lang="fr-FR" dirty="0" err="1"/>
               <a:t>numpy</a:t>
             </a:r>
             <a:r>
-              <a:rPr lang="fr-FR" dirty="0" smtClean="0"/>
+              <a:rPr lang="fr-FR" dirty="0"/>
               <a:t> sont surchargés</a:t>
             </a:r>
           </a:p>
           <a:p>
             <a:r>
-              <a:rPr lang="fr-FR" dirty="0" smtClean="0"/>
+              <a:rPr lang="fr-FR" dirty="0"/>
               <a:t>Les fonctions </a:t>
             </a:r>
             <a:r>
-              <a:rPr lang="fr-FR" dirty="0" err="1" smtClean="0"/>
+              <a:rPr lang="fr-FR" dirty="0" err="1"/>
               <a:t>numpy</a:t>
             </a:r>
             <a:r>
-              <a:rPr lang="fr-FR" dirty="0" smtClean="0"/>
+              <a:rPr lang="fr-FR" dirty="0"/>
               <a:t> sont des </a:t>
             </a:r>
             <a:r>
-              <a:rPr lang="fr-FR" dirty="0" err="1" smtClean="0"/>
+              <a:rPr lang="fr-FR" dirty="0" err="1"/>
               <a:t>map</a:t>
             </a:r>
             <a:endParaRPr lang="fr-FR" dirty="0"/>
@@ -5012,10 +4292,9 @@
           <a:lstStyle/>
           <a:p>
             <a:r>
-              <a:rPr lang="fr-FR" dirty="0" smtClean="0"/>
+              <a:rPr lang="fr-FR" dirty="0"/>
               <a:t>Opérateurs et fonctions</a:t>
             </a:r>
-            <a:endParaRPr lang="fr-FR" dirty="0"/>
           </a:p>
         </p:txBody>
       </p:sp>
@@ -5029,13 +4308,515 @@
   <p:clrMapOvr>
     <a:masterClrMapping/>
   </p:clrMapOvr>
-  <p:timing>
-    <p:tnLst>
-      <p:par>
-        <p:cTn id="1" dur="indefinite" restart="never" nodeType="tmRoot"/>
-      </p:par>
-    </p:tnLst>
-  </p:timing>
+</p:sld>
+</file>
+
+<file path=ppt/slides/slide13.xml><?xml version="1.0" encoding="utf-8"?>
+<p:sld xmlns:a="http://schemas.openxmlformats.org/drawingml/2006/main" xmlns:r="http://schemas.openxmlformats.org/officeDocument/2006/relationships" xmlns:p="http://schemas.openxmlformats.org/presentationml/2006/main">
+  <p:cSld>
+    <p:spTree>
+      <p:nvGrpSpPr>
+        <p:cNvPr id="1" name=""/>
+        <p:cNvGrpSpPr/>
+        <p:nvPr/>
+      </p:nvGrpSpPr>
+      <p:grpSpPr>
+        <a:xfrm>
+          <a:off x="0" y="0"/>
+          <a:ext cx="0" cy="0"/>
+          <a:chOff x="0" y="0"/>
+          <a:chExt cx="0" cy="0"/>
+        </a:xfrm>
+      </p:grpSpPr>
+      <p:sp>
+        <p:nvSpPr>
+          <p:cNvPr id="2" name="Titre 1"/>
+          <p:cNvSpPr>
+            <a:spLocks noGrp="1"/>
+          </p:cNvSpPr>
+          <p:nvPr>
+            <p:ph type="title"/>
+          </p:nvPr>
+        </p:nvSpPr>
+        <p:spPr/>
+        <p:txBody>
+          <a:bodyPr/>
+          <a:lstStyle/>
+          <a:p>
+            <a:r>
+              <a:rPr lang="fr-FR" dirty="0"/>
+              <a:t>Réduction</a:t>
+            </a:r>
+          </a:p>
+        </p:txBody>
+      </p:sp>
+      <p:sp>
+        <p:nvSpPr>
+          <p:cNvPr id="3" name="Espace réservé du contenu 2"/>
+          <p:cNvSpPr>
+            <a:spLocks noGrp="1"/>
+          </p:cNvSpPr>
+          <p:nvPr>
+            <p:ph idx="1"/>
+          </p:nvPr>
+        </p:nvSpPr>
+        <p:spPr/>
+        <p:txBody>
+          <a:bodyPr/>
+          <a:lstStyle/>
+          <a:p>
+            <a:r>
+              <a:rPr lang="fr-FR"/>
+              <a:t>Les fonctions </a:t>
+            </a:r>
+            <a:r>
+              <a:rPr lang="fr-FR" dirty="0"/>
+              <a:t>de réduction de base existent</a:t>
+            </a:r>
+          </a:p>
+          <a:p>
+            <a:pPr lvl="1"/>
+            <a:r>
+              <a:rPr lang="fr-FR" dirty="0" err="1"/>
+              <a:t>Sum</a:t>
+            </a:r>
+            <a:endParaRPr lang="fr-FR" dirty="0"/>
+          </a:p>
+          <a:p>
+            <a:pPr lvl="1"/>
+            <a:r>
+              <a:rPr lang="fr-FR" dirty="0"/>
+              <a:t>Max</a:t>
+            </a:r>
+          </a:p>
+          <a:p>
+            <a:pPr lvl="1"/>
+            <a:r>
+              <a:rPr lang="fr-FR" dirty="0"/>
+              <a:t>Min</a:t>
+            </a:r>
+          </a:p>
+          <a:p>
+            <a:pPr lvl="1"/>
+            <a:r>
+              <a:rPr lang="fr-FR" dirty="0"/>
+              <a:t>…</a:t>
+            </a:r>
+          </a:p>
+        </p:txBody>
+      </p:sp>
+    </p:spTree>
+    <p:extLst>
+      <p:ext uri="{BB962C8B-B14F-4D97-AF65-F5344CB8AC3E}">
+        <p14:creationId xmlns:p14="http://schemas.microsoft.com/office/powerpoint/2010/main" val="190882761"/>
+      </p:ext>
+    </p:extLst>
+  </p:cSld>
+  <p:clrMapOvr>
+    <a:masterClrMapping/>
+  </p:clrMapOvr>
+</p:sld>
+</file>
+
+<file path=ppt/slides/slide14.xml><?xml version="1.0" encoding="utf-8"?>
+<p:sld xmlns:a="http://schemas.openxmlformats.org/drawingml/2006/main" xmlns:r="http://schemas.openxmlformats.org/officeDocument/2006/relationships" xmlns:p="http://schemas.openxmlformats.org/presentationml/2006/main">
+  <p:cSld>
+    <p:spTree>
+      <p:nvGrpSpPr>
+        <p:cNvPr id="1" name=""/>
+        <p:cNvGrpSpPr/>
+        <p:nvPr/>
+      </p:nvGrpSpPr>
+      <p:grpSpPr>
+        <a:xfrm>
+          <a:off x="0" y="0"/>
+          <a:ext cx="0" cy="0"/>
+          <a:chOff x="0" y="0"/>
+          <a:chExt cx="0" cy="0"/>
+        </a:xfrm>
+      </p:grpSpPr>
+      <p:sp>
+        <p:nvSpPr>
+          <p:cNvPr id="2" name="Titre 1"/>
+          <p:cNvSpPr>
+            <a:spLocks noGrp="1"/>
+          </p:cNvSpPr>
+          <p:nvPr>
+            <p:ph type="title"/>
+          </p:nvPr>
+        </p:nvSpPr>
+        <p:spPr/>
+        <p:txBody>
+          <a:bodyPr/>
+          <a:lstStyle/>
+          <a:p>
+            <a:r>
+              <a:rPr lang="fr-FR" dirty="0"/>
+              <a:t>Propriétés des tableaux</a:t>
+            </a:r>
+          </a:p>
+        </p:txBody>
+      </p:sp>
+      <p:sp>
+        <p:nvSpPr>
+          <p:cNvPr id="3" name="Espace réservé du contenu 2"/>
+          <p:cNvSpPr>
+            <a:spLocks noGrp="1"/>
+          </p:cNvSpPr>
+          <p:nvPr>
+            <p:ph idx="1"/>
+          </p:nvPr>
+        </p:nvSpPr>
+        <p:spPr/>
+        <p:txBody>
+          <a:bodyPr/>
+          <a:lstStyle/>
+          <a:p>
+            <a:r>
+              <a:rPr lang="fr-FR" dirty="0" err="1"/>
+              <a:t>np.random.seed</a:t>
+            </a:r>
+            <a:r>
+              <a:rPr lang="fr-FR" dirty="0"/>
+              <a:t>(0)</a:t>
+            </a:r>
+          </a:p>
+          <a:p>
+            <a:r>
+              <a:rPr lang="fr-FR" dirty="0"/>
+              <a:t>x1 = </a:t>
+            </a:r>
+            <a:r>
+              <a:rPr lang="fr-FR" dirty="0" err="1"/>
+              <a:t>np.random.randint</a:t>
+            </a:r>
+            <a:r>
+              <a:rPr lang="fr-FR" dirty="0"/>
+              <a:t>(10, size=6)</a:t>
+            </a:r>
+          </a:p>
+          <a:p>
+            <a:r>
+              <a:rPr lang="fr-FR" dirty="0" err="1"/>
+              <a:t>print</a:t>
+            </a:r>
+            <a:r>
+              <a:rPr lang="fr-FR" dirty="0"/>
+              <a:t>("nombre de dimensions de x1: ", x1.ndim)</a:t>
+            </a:r>
+          </a:p>
+          <a:p>
+            <a:r>
+              <a:rPr lang="fr-FR" dirty="0" err="1"/>
+              <a:t>print</a:t>
+            </a:r>
+            <a:r>
+              <a:rPr lang="fr-FR" dirty="0"/>
+              <a:t>("forme de x1: ", x1.shape)</a:t>
+            </a:r>
+          </a:p>
+          <a:p>
+            <a:r>
+              <a:rPr lang="fr-FR" dirty="0" err="1"/>
+              <a:t>print</a:t>
+            </a:r>
+            <a:r>
+              <a:rPr lang="fr-FR" dirty="0"/>
+              <a:t>("taille de x1: ", x1.size)</a:t>
+            </a:r>
+          </a:p>
+          <a:p>
+            <a:r>
+              <a:rPr lang="fr-FR" dirty="0" err="1"/>
+              <a:t>print</a:t>
+            </a:r>
+            <a:r>
+              <a:rPr lang="fr-FR" dirty="0"/>
+              <a:t>("type de x1: ", x1.dtype)</a:t>
+            </a:r>
+          </a:p>
+        </p:txBody>
+      </p:sp>
+    </p:spTree>
+    <p:extLst>
+      <p:ext uri="{BB962C8B-B14F-4D97-AF65-F5344CB8AC3E}">
+        <p14:creationId xmlns:p14="http://schemas.microsoft.com/office/powerpoint/2010/main" val="2020021898"/>
+      </p:ext>
+    </p:extLst>
+  </p:cSld>
+  <p:clrMapOvr>
+    <a:masterClrMapping/>
+  </p:clrMapOvr>
+</p:sld>
+</file>
+
+<file path=ppt/slides/slide15.xml><?xml version="1.0" encoding="utf-8"?>
+<p:sld xmlns:a="http://schemas.openxmlformats.org/drawingml/2006/main" xmlns:r="http://schemas.openxmlformats.org/officeDocument/2006/relationships" xmlns:p="http://schemas.openxmlformats.org/presentationml/2006/main">
+  <p:cSld>
+    <p:spTree>
+      <p:nvGrpSpPr>
+        <p:cNvPr id="1" name=""/>
+        <p:cNvGrpSpPr/>
+        <p:nvPr/>
+      </p:nvGrpSpPr>
+      <p:grpSpPr>
+        <a:xfrm>
+          <a:off x="0" y="0"/>
+          <a:ext cx="0" cy="0"/>
+          <a:chOff x="0" y="0"/>
+          <a:chExt cx="0" cy="0"/>
+        </a:xfrm>
+      </p:grpSpPr>
+      <p:sp>
+        <p:nvSpPr>
+          <p:cNvPr id="2" name="Titre 1"/>
+          <p:cNvSpPr>
+            <a:spLocks noGrp="1"/>
+          </p:cNvSpPr>
+          <p:nvPr>
+            <p:ph type="title"/>
+          </p:nvPr>
+        </p:nvSpPr>
+        <p:spPr/>
+        <p:txBody>
+          <a:bodyPr/>
+          <a:lstStyle/>
+          <a:p>
+            <a:r>
+              <a:rPr lang="fr-FR" dirty="0"/>
+              <a:t>Indexation</a:t>
+            </a:r>
+          </a:p>
+        </p:txBody>
+      </p:sp>
+      <p:sp>
+        <p:nvSpPr>
+          <p:cNvPr id="3" name="Espace réservé du contenu 2"/>
+          <p:cNvSpPr>
+            <a:spLocks noGrp="1"/>
+          </p:cNvSpPr>
+          <p:nvPr>
+            <p:ph idx="1"/>
+          </p:nvPr>
+        </p:nvSpPr>
+        <p:spPr/>
+        <p:txBody>
+          <a:bodyPr/>
+          <a:lstStyle/>
+          <a:p>
+            <a:r>
+              <a:rPr lang="fr-FR" dirty="0"/>
+              <a:t>Identique à Python</a:t>
+            </a:r>
+          </a:p>
+          <a:p>
+            <a:pPr lvl="1"/>
+            <a:r>
+              <a:rPr lang="fr-FR" dirty="0" err="1"/>
+              <a:t>print</a:t>
+            </a:r>
+            <a:r>
+              <a:rPr lang="fr-FR" dirty="0"/>
+              <a:t>(x1[0])</a:t>
+            </a:r>
+          </a:p>
+          <a:p>
+            <a:pPr lvl="1"/>
+            <a:r>
+              <a:rPr lang="fr-FR" dirty="0" err="1"/>
+              <a:t>print</a:t>
+            </a:r>
+            <a:r>
+              <a:rPr lang="fr-FR" dirty="0"/>
+              <a:t>(x1[-1])</a:t>
+            </a:r>
+          </a:p>
+          <a:p>
+            <a:pPr lvl="1"/>
+            <a:r>
+              <a:rPr lang="fr-FR" dirty="0"/>
+              <a:t>x1[1] = 1000</a:t>
+            </a:r>
+          </a:p>
+          <a:p>
+            <a:pPr lvl="1"/>
+            <a:r>
+              <a:rPr lang="fr-FR" dirty="0" err="1"/>
+              <a:t>print</a:t>
+            </a:r>
+            <a:r>
+              <a:rPr lang="fr-FR" dirty="0"/>
+              <a:t>(x1[2:5]) # De 2 à 5 non inclus</a:t>
+            </a:r>
+          </a:p>
+          <a:p>
+            <a:pPr lvl="1"/>
+            <a:r>
+              <a:rPr lang="fr-FR" dirty="0" err="1"/>
+              <a:t>print</a:t>
+            </a:r>
+            <a:r>
+              <a:rPr lang="fr-FR" dirty="0"/>
+              <a:t>(x1[:5])  # Les cinq premiers éléments</a:t>
+            </a:r>
+          </a:p>
+          <a:p>
+            <a:pPr lvl="1"/>
+            <a:r>
+              <a:rPr lang="fr-FR" dirty="0" err="1"/>
+              <a:t>print</a:t>
+            </a:r>
+            <a:r>
+              <a:rPr lang="fr-FR" dirty="0"/>
+              <a:t>(x1[5:])  # Les éléments à partir de l'index 5</a:t>
+            </a:r>
+          </a:p>
+          <a:p>
+            <a:pPr lvl="1"/>
+            <a:r>
+              <a:rPr lang="fr-FR" dirty="0" err="1"/>
+              <a:t>print</a:t>
+            </a:r>
+            <a:r>
+              <a:rPr lang="fr-FR" dirty="0"/>
+              <a:t>(x1[::2])  # Un élément sur deux</a:t>
+            </a:r>
+          </a:p>
+        </p:txBody>
+      </p:sp>
+    </p:spTree>
+    <p:extLst>
+      <p:ext uri="{BB962C8B-B14F-4D97-AF65-F5344CB8AC3E}">
+        <p14:creationId xmlns:p14="http://schemas.microsoft.com/office/powerpoint/2010/main" val="504008724"/>
+      </p:ext>
+    </p:extLst>
+  </p:cSld>
+  <p:clrMapOvr>
+    <a:masterClrMapping/>
+  </p:clrMapOvr>
+</p:sld>
+</file>
+
+<file path=ppt/slides/slide16.xml><?xml version="1.0" encoding="utf-8"?>
+<p:sld xmlns:a="http://schemas.openxmlformats.org/drawingml/2006/main" xmlns:r="http://schemas.openxmlformats.org/officeDocument/2006/relationships" xmlns:p="http://schemas.openxmlformats.org/presentationml/2006/main">
+  <p:cSld>
+    <p:spTree>
+      <p:nvGrpSpPr>
+        <p:cNvPr id="1" name=""/>
+        <p:cNvGrpSpPr/>
+        <p:nvPr/>
+      </p:nvGrpSpPr>
+      <p:grpSpPr>
+        <a:xfrm>
+          <a:off x="0" y="0"/>
+          <a:ext cx="0" cy="0"/>
+          <a:chOff x="0" y="0"/>
+          <a:chExt cx="0" cy="0"/>
+        </a:xfrm>
+      </p:grpSpPr>
+      <p:sp>
+        <p:nvSpPr>
+          <p:cNvPr id="2" name="Titre 1"/>
+          <p:cNvSpPr>
+            <a:spLocks noGrp="1"/>
+          </p:cNvSpPr>
+          <p:nvPr>
+            <p:ph type="title"/>
+          </p:nvPr>
+        </p:nvSpPr>
+        <p:spPr/>
+        <p:txBody>
+          <a:bodyPr/>
+          <a:lstStyle/>
+          <a:p>
+            <a:r>
+              <a:rPr lang="fr-FR" dirty="0"/>
+              <a:t>Filtrage</a:t>
+            </a:r>
+          </a:p>
+        </p:txBody>
+      </p:sp>
+      <p:sp>
+        <p:nvSpPr>
+          <p:cNvPr id="3" name="Espace réservé du contenu 2"/>
+          <p:cNvSpPr>
+            <a:spLocks noGrp="1"/>
+          </p:cNvSpPr>
+          <p:nvPr>
+            <p:ph idx="1"/>
+          </p:nvPr>
+        </p:nvSpPr>
+        <p:spPr/>
+        <p:txBody>
+          <a:bodyPr/>
+          <a:lstStyle/>
+          <a:p>
+            <a:r>
+              <a:rPr lang="fr-FR" dirty="0"/>
+              <a:t>x = </a:t>
+            </a:r>
+            <a:r>
+              <a:rPr lang="fr-FR" dirty="0" err="1"/>
+              <a:t>np.random.rand</a:t>
+            </a:r>
+            <a:r>
+              <a:rPr lang="fr-FR" dirty="0"/>
+              <a:t>(10)</a:t>
+            </a:r>
+          </a:p>
+          <a:p>
+            <a:r>
+              <a:rPr lang="fr-FR" dirty="0"/>
+              <a:t>x &gt; 0.5</a:t>
+            </a:r>
+          </a:p>
+          <a:p>
+            <a:pPr lvl="1"/>
+            <a:r>
+              <a:rPr lang="fr-FR" dirty="0"/>
+              <a:t>Renvoie un tableau de booléens</a:t>
+            </a:r>
+          </a:p>
+          <a:p>
+            <a:r>
+              <a:rPr lang="fr-FR" dirty="0"/>
+              <a:t>X[</a:t>
+            </a:r>
+            <a:r>
+              <a:rPr lang="fr-FR" dirty="0" err="1"/>
+              <a:t>booleans</a:t>
+            </a:r>
+            <a:r>
+              <a:rPr lang="fr-FR" dirty="0"/>
+              <a:t>]</a:t>
+            </a:r>
+          </a:p>
+          <a:p>
+            <a:pPr lvl="1"/>
+            <a:r>
+              <a:rPr lang="fr-FR" dirty="0"/>
+              <a:t>Filtre</a:t>
+            </a:r>
+          </a:p>
+          <a:p>
+            <a:pPr lvl="1"/>
+            <a:r>
+              <a:rPr lang="fr-FR" dirty="0"/>
+              <a:t>X[x &gt; 0.5]</a:t>
+            </a:r>
+          </a:p>
+        </p:txBody>
+      </p:sp>
+    </p:spTree>
+    <p:extLst>
+      <p:ext uri="{BB962C8B-B14F-4D97-AF65-F5344CB8AC3E}">
+        <p14:creationId xmlns:p14="http://schemas.microsoft.com/office/powerpoint/2010/main" val="1871390466"/>
+      </p:ext>
+    </p:extLst>
+  </p:cSld>
+  <p:clrMapOvr>
+    <a:masterClrMapping/>
+  </p:clrMapOvr>
 </p:sld>
 </file>
 
@@ -5072,8 +4853,8 @@
           <a:lstStyle/>
           <a:p>
             <a:r>
-              <a:rPr lang="fr-FR" dirty="0" smtClean="0"/>
-              <a:t>Réduction</a:t>
+              <a:rPr lang="fr-FR" dirty="0" err="1"/>
+              <a:t>Matplotlib</a:t>
             </a:r>
             <a:endParaRPr lang="fr-FR" dirty="0"/>
           </a:p>
@@ -5095,725 +4876,15 @@
           <a:lstStyle/>
           <a:p>
             <a:r>
-              <a:rPr lang="fr-FR" dirty="0" smtClean="0"/>
-              <a:t>Les fonction de réduction de base existent</a:t>
-            </a:r>
-          </a:p>
-          <a:p>
-            <a:pPr lvl="1"/>
-            <a:r>
-              <a:rPr lang="fr-FR" dirty="0" err="1" smtClean="0"/>
-              <a:t>Sum</a:t>
-            </a:r>
-            <a:endParaRPr lang="fr-FR" dirty="0" smtClean="0"/>
-          </a:p>
-          <a:p>
-            <a:pPr lvl="1"/>
-            <a:r>
-              <a:rPr lang="fr-FR" dirty="0" smtClean="0"/>
-              <a:t>Max</a:t>
-            </a:r>
-          </a:p>
-          <a:p>
-            <a:pPr lvl="1"/>
-            <a:r>
-              <a:rPr lang="fr-FR" dirty="0" smtClean="0"/>
-              <a:t>Min</a:t>
-            </a:r>
-          </a:p>
-          <a:p>
-            <a:pPr lvl="1"/>
-            <a:r>
-              <a:rPr lang="fr-FR" dirty="0" smtClean="0"/>
-              <a:t>…</a:t>
-            </a:r>
-          </a:p>
-        </p:txBody>
-      </p:sp>
-    </p:spTree>
-    <p:extLst>
-      <p:ext uri="{BB962C8B-B14F-4D97-AF65-F5344CB8AC3E}">
-        <p14:creationId xmlns:p14="http://schemas.microsoft.com/office/powerpoint/2010/main" val="190882761"/>
-      </p:ext>
-    </p:extLst>
-  </p:cSld>
-  <p:clrMapOvr>
-    <a:masterClrMapping/>
-  </p:clrMapOvr>
-  <p:timing>
-    <p:tnLst>
-      <p:par>
-        <p:cTn id="1" dur="indefinite" restart="never" nodeType="tmRoot"/>
-      </p:par>
-    </p:tnLst>
-  </p:timing>
-</p:sld>
-</file>
-
-<file path=ppt/slides/slide18.xml><?xml version="1.0" encoding="utf-8"?>
-<p:sld xmlns:a="http://schemas.openxmlformats.org/drawingml/2006/main" xmlns:r="http://schemas.openxmlformats.org/officeDocument/2006/relationships" xmlns:p="http://schemas.openxmlformats.org/presentationml/2006/main">
-  <p:cSld>
-    <p:spTree>
-      <p:nvGrpSpPr>
-        <p:cNvPr id="1" name=""/>
-        <p:cNvGrpSpPr/>
-        <p:nvPr/>
-      </p:nvGrpSpPr>
-      <p:grpSpPr>
-        <a:xfrm>
-          <a:off x="0" y="0"/>
-          <a:ext cx="0" cy="0"/>
-          <a:chOff x="0" y="0"/>
-          <a:chExt cx="0" cy="0"/>
-        </a:xfrm>
-      </p:grpSpPr>
-      <p:sp>
-        <p:nvSpPr>
-          <p:cNvPr id="2" name="Titre 1"/>
-          <p:cNvSpPr>
-            <a:spLocks noGrp="1"/>
-          </p:cNvSpPr>
-          <p:nvPr>
-            <p:ph type="title"/>
-          </p:nvPr>
-        </p:nvSpPr>
-        <p:spPr/>
-        <p:txBody>
-          <a:bodyPr/>
-          <a:lstStyle/>
-          <a:p>
-            <a:r>
-              <a:rPr lang="fr-FR" dirty="0" smtClean="0"/>
-              <a:t>Propriétés des tableaux</a:t>
-            </a:r>
-            <a:endParaRPr lang="fr-FR" dirty="0"/>
-          </a:p>
-        </p:txBody>
-      </p:sp>
-      <p:sp>
-        <p:nvSpPr>
-          <p:cNvPr id="3" name="Espace réservé du contenu 2"/>
-          <p:cNvSpPr>
-            <a:spLocks noGrp="1"/>
-          </p:cNvSpPr>
-          <p:nvPr>
-            <p:ph idx="1"/>
-          </p:nvPr>
-        </p:nvSpPr>
-        <p:spPr/>
-        <p:txBody>
-          <a:bodyPr/>
-          <a:lstStyle/>
-          <a:p>
-            <a:r>
               <a:rPr lang="fr-FR" dirty="0" err="1"/>
-              <a:t>np.random.seed</a:t>
+              <a:t>Matplotlib</a:t>
             </a:r>
             <a:r>
               <a:rPr lang="fr-FR" dirty="0"/>
-              <a:t>(0)</a:t>
-            </a:r>
-          </a:p>
-          <a:p>
-            <a:r>
-              <a:rPr lang="fr-FR" dirty="0"/>
-              <a:t>x1 = </a:t>
+              <a:t> est complètement compatible avec les </a:t>
             </a:r>
             <a:r>
               <a:rPr lang="fr-FR" dirty="0" err="1"/>
-              <a:t>np.random.randint</a:t>
-            </a:r>
-            <a:r>
-              <a:rPr lang="fr-FR" dirty="0"/>
-              <a:t>(10, </a:t>
-            </a:r>
-            <a:r>
-              <a:rPr lang="fr-FR" dirty="0" smtClean="0"/>
-              <a:t>size=6)</a:t>
-            </a:r>
-          </a:p>
-          <a:p>
-            <a:r>
-              <a:rPr lang="fr-FR" dirty="0" err="1" smtClean="0"/>
-              <a:t>print</a:t>
-            </a:r>
-            <a:r>
-              <a:rPr lang="fr-FR" dirty="0"/>
-              <a:t>("nombre de dimensions de x1: ", x1.ndim)</a:t>
-            </a:r>
-          </a:p>
-          <a:p>
-            <a:r>
-              <a:rPr lang="fr-FR" dirty="0" err="1"/>
-              <a:t>print</a:t>
-            </a:r>
-            <a:r>
-              <a:rPr lang="fr-FR" dirty="0"/>
-              <a:t>("forme de x1: ", x1.shape)</a:t>
-            </a:r>
-          </a:p>
-          <a:p>
-            <a:r>
-              <a:rPr lang="fr-FR" dirty="0" err="1"/>
-              <a:t>print</a:t>
-            </a:r>
-            <a:r>
-              <a:rPr lang="fr-FR" dirty="0"/>
-              <a:t>("taille de x1: ", x1.size)</a:t>
-            </a:r>
-          </a:p>
-          <a:p>
-            <a:r>
-              <a:rPr lang="fr-FR" dirty="0" err="1"/>
-              <a:t>print</a:t>
-            </a:r>
-            <a:r>
-              <a:rPr lang="fr-FR" dirty="0"/>
-              <a:t>("type de x1: ", x1.dtype)</a:t>
-            </a:r>
-          </a:p>
-        </p:txBody>
-      </p:sp>
-    </p:spTree>
-    <p:extLst>
-      <p:ext uri="{BB962C8B-B14F-4D97-AF65-F5344CB8AC3E}">
-        <p14:creationId xmlns:p14="http://schemas.microsoft.com/office/powerpoint/2010/main" val="2020021898"/>
-      </p:ext>
-    </p:extLst>
-  </p:cSld>
-  <p:clrMapOvr>
-    <a:masterClrMapping/>
-  </p:clrMapOvr>
-  <p:timing>
-    <p:tnLst>
-      <p:par>
-        <p:cTn id="1" dur="indefinite" restart="never" nodeType="tmRoot"/>
-      </p:par>
-    </p:tnLst>
-  </p:timing>
-</p:sld>
-</file>
-
-<file path=ppt/slides/slide19.xml><?xml version="1.0" encoding="utf-8"?>
-<p:sld xmlns:a="http://schemas.openxmlformats.org/drawingml/2006/main" xmlns:r="http://schemas.openxmlformats.org/officeDocument/2006/relationships" xmlns:p="http://schemas.openxmlformats.org/presentationml/2006/main">
-  <p:cSld>
-    <p:spTree>
-      <p:nvGrpSpPr>
-        <p:cNvPr id="1" name=""/>
-        <p:cNvGrpSpPr/>
-        <p:nvPr/>
-      </p:nvGrpSpPr>
-      <p:grpSpPr>
-        <a:xfrm>
-          <a:off x="0" y="0"/>
-          <a:ext cx="0" cy="0"/>
-          <a:chOff x="0" y="0"/>
-          <a:chExt cx="0" cy="0"/>
-        </a:xfrm>
-      </p:grpSpPr>
-      <p:sp>
-        <p:nvSpPr>
-          <p:cNvPr id="2" name="Titre 1"/>
-          <p:cNvSpPr>
-            <a:spLocks noGrp="1"/>
-          </p:cNvSpPr>
-          <p:nvPr>
-            <p:ph type="title"/>
-          </p:nvPr>
-        </p:nvSpPr>
-        <p:spPr/>
-        <p:txBody>
-          <a:bodyPr/>
-          <a:lstStyle/>
-          <a:p>
-            <a:r>
-              <a:rPr lang="fr-FR" dirty="0" smtClean="0"/>
-              <a:t>Indexation</a:t>
-            </a:r>
-            <a:endParaRPr lang="fr-FR" dirty="0"/>
-          </a:p>
-        </p:txBody>
-      </p:sp>
-      <p:sp>
-        <p:nvSpPr>
-          <p:cNvPr id="3" name="Espace réservé du contenu 2"/>
-          <p:cNvSpPr>
-            <a:spLocks noGrp="1"/>
-          </p:cNvSpPr>
-          <p:nvPr>
-            <p:ph idx="1"/>
-          </p:nvPr>
-        </p:nvSpPr>
-        <p:spPr/>
-        <p:txBody>
-          <a:bodyPr/>
-          <a:lstStyle/>
-          <a:p>
-            <a:r>
-              <a:rPr lang="fr-FR" dirty="0" smtClean="0"/>
-              <a:t>Identique à Python</a:t>
-            </a:r>
-          </a:p>
-          <a:p>
-            <a:pPr lvl="1"/>
-            <a:r>
-              <a:rPr lang="fr-FR" dirty="0" err="1" smtClean="0"/>
-              <a:t>print</a:t>
-            </a:r>
-            <a:r>
-              <a:rPr lang="fr-FR" dirty="0" smtClean="0"/>
-              <a:t>(x1[0</a:t>
-            </a:r>
-            <a:r>
-              <a:rPr lang="fr-FR" dirty="0"/>
-              <a:t>])</a:t>
-            </a:r>
-          </a:p>
-          <a:p>
-            <a:pPr lvl="1"/>
-            <a:r>
-              <a:rPr lang="fr-FR" dirty="0" err="1" smtClean="0"/>
-              <a:t>print</a:t>
-            </a:r>
-            <a:r>
-              <a:rPr lang="fr-FR" dirty="0" smtClean="0"/>
-              <a:t>(x1</a:t>
-            </a:r>
-            <a:r>
-              <a:rPr lang="fr-FR" dirty="0"/>
-              <a:t>[-1])</a:t>
-            </a:r>
-          </a:p>
-          <a:p>
-            <a:pPr lvl="1"/>
-            <a:r>
-              <a:rPr lang="fr-FR" dirty="0" smtClean="0"/>
-              <a:t>x1[1</a:t>
-            </a:r>
-            <a:r>
-              <a:rPr lang="fr-FR" dirty="0"/>
-              <a:t>] = "1000"</a:t>
-            </a:r>
-          </a:p>
-          <a:p>
-            <a:pPr lvl="1"/>
-            <a:r>
-              <a:rPr lang="fr-FR" dirty="0" err="1" smtClean="0"/>
-              <a:t>print</a:t>
-            </a:r>
-            <a:r>
-              <a:rPr lang="fr-FR" dirty="0" smtClean="0"/>
-              <a:t>(x1</a:t>
-            </a:r>
-            <a:r>
-              <a:rPr lang="fr-FR" dirty="0"/>
-              <a:t>[:5])  # Les cinq premiers éléments</a:t>
-            </a:r>
-          </a:p>
-          <a:p>
-            <a:pPr lvl="1"/>
-            <a:r>
-              <a:rPr lang="fr-FR" dirty="0" err="1" smtClean="0"/>
-              <a:t>print</a:t>
-            </a:r>
-            <a:r>
-              <a:rPr lang="fr-FR" dirty="0" smtClean="0"/>
-              <a:t>(x1[5</a:t>
-            </a:r>
-            <a:r>
-              <a:rPr lang="fr-FR" dirty="0"/>
-              <a:t>:])  # Les éléments à partir de l'index 5</a:t>
-            </a:r>
-          </a:p>
-          <a:p>
-            <a:pPr lvl="1"/>
-            <a:r>
-              <a:rPr lang="fr-FR" dirty="0" err="1" smtClean="0"/>
-              <a:t>print</a:t>
-            </a:r>
-            <a:r>
-              <a:rPr lang="fr-FR" dirty="0" smtClean="0"/>
-              <a:t>(x1</a:t>
-            </a:r>
-            <a:r>
-              <a:rPr lang="fr-FR" dirty="0"/>
-              <a:t>[::2])  # Un élément sur deux</a:t>
-            </a:r>
-          </a:p>
-        </p:txBody>
-      </p:sp>
-    </p:spTree>
-    <p:extLst>
-      <p:ext uri="{BB962C8B-B14F-4D97-AF65-F5344CB8AC3E}">
-        <p14:creationId xmlns:p14="http://schemas.microsoft.com/office/powerpoint/2010/main" val="504008724"/>
-      </p:ext>
-    </p:extLst>
-  </p:cSld>
-  <p:clrMapOvr>
-    <a:masterClrMapping/>
-  </p:clrMapOvr>
-  <p:timing>
-    <p:tnLst>
-      <p:par>
-        <p:cTn id="1" dur="indefinite" restart="never" nodeType="tmRoot"/>
-      </p:par>
-    </p:tnLst>
-  </p:timing>
-</p:sld>
-</file>
-
-<file path=ppt/slides/slide2.xml><?xml version="1.0" encoding="utf-8"?>
-<p:sld xmlns:a="http://schemas.openxmlformats.org/drawingml/2006/main" xmlns:r="http://schemas.openxmlformats.org/officeDocument/2006/relationships" xmlns:p="http://schemas.openxmlformats.org/presentationml/2006/main">
-  <p:cSld>
-    <p:spTree>
-      <p:nvGrpSpPr>
-        <p:cNvPr id="1" name=""/>
-        <p:cNvGrpSpPr/>
-        <p:nvPr/>
-      </p:nvGrpSpPr>
-      <p:grpSpPr>
-        <a:xfrm>
-          <a:off x="0" y="0"/>
-          <a:ext cx="0" cy="0"/>
-          <a:chOff x="0" y="0"/>
-          <a:chExt cx="0" cy="0"/>
-        </a:xfrm>
-      </p:grpSpPr>
-      <p:sp>
-        <p:nvSpPr>
-          <p:cNvPr id="2" name="Titre 1"/>
-          <p:cNvSpPr>
-            <a:spLocks noGrp="1"/>
-          </p:cNvSpPr>
-          <p:nvPr>
-            <p:ph type="title"/>
-          </p:nvPr>
-        </p:nvSpPr>
-        <p:spPr/>
-        <p:txBody>
-          <a:bodyPr/>
-          <a:lstStyle/>
-          <a:p>
-            <a:r>
-              <a:rPr lang="fr-FR" dirty="0" smtClean="0"/>
-              <a:t>Python et les Maths</a:t>
-            </a:r>
-            <a:endParaRPr lang="fr-FR" dirty="0"/>
-          </a:p>
-        </p:txBody>
-      </p:sp>
-      <p:sp>
-        <p:nvSpPr>
-          <p:cNvPr id="3" name="Espace réservé du contenu 2"/>
-          <p:cNvSpPr>
-            <a:spLocks noGrp="1"/>
-          </p:cNvSpPr>
-          <p:nvPr>
-            <p:ph idx="1"/>
-          </p:nvPr>
-        </p:nvSpPr>
-        <p:spPr/>
-        <p:txBody>
-          <a:bodyPr/>
-          <a:lstStyle/>
-          <a:p>
-            <a:r>
-              <a:rPr lang="fr-FR" dirty="0" smtClean="0"/>
-              <a:t>Python a rencontré un grand succès dans le monde scientifique, mathématiques et de l’IA</a:t>
-            </a:r>
-          </a:p>
-          <a:p>
-            <a:r>
-              <a:rPr lang="fr-FR" dirty="0" smtClean="0"/>
-              <a:t>De nombreux modules sont à disposition</a:t>
-            </a:r>
-          </a:p>
-          <a:p>
-            <a:pPr lvl="1"/>
-            <a:r>
-              <a:rPr lang="fr-FR" dirty="0" err="1" smtClean="0"/>
-              <a:t>Numpy</a:t>
-            </a:r>
-            <a:r>
-              <a:rPr lang="fr-FR" dirty="0" smtClean="0"/>
-              <a:t>, </a:t>
-            </a:r>
-            <a:r>
-              <a:rPr lang="fr-FR" dirty="0" err="1" smtClean="0"/>
-              <a:t>Scipy</a:t>
-            </a:r>
-            <a:r>
-              <a:rPr lang="fr-FR" dirty="0" smtClean="0"/>
-              <a:t>, </a:t>
-            </a:r>
-            <a:r>
-              <a:rPr lang="fr-FR" dirty="0" err="1" smtClean="0"/>
-              <a:t>Scikit-learn</a:t>
-            </a:r>
-            <a:r>
-              <a:rPr lang="fr-FR" dirty="0" smtClean="0"/>
-              <a:t>, …</a:t>
-            </a:r>
-          </a:p>
-          <a:p>
-            <a:r>
-              <a:rPr lang="fr-FR" dirty="0" smtClean="0"/>
-              <a:t>Le module math possède les méthodes de base</a:t>
-            </a:r>
-            <a:endParaRPr lang="fr-FR" dirty="0"/>
-          </a:p>
-        </p:txBody>
-      </p:sp>
-      <p:pic>
-        <p:nvPicPr>
-          <p:cNvPr id="5" name="Image 4"/>
-          <p:cNvPicPr>
-            <a:picLocks noChangeAspect="1"/>
-          </p:cNvPicPr>
-          <p:nvPr/>
-        </p:nvPicPr>
-        <p:blipFill>
-          <a:blip r:embed="rId2"/>
-          <a:stretch>
-            <a:fillRect/>
-          </a:stretch>
-        </p:blipFill>
-        <p:spPr>
-          <a:xfrm>
-            <a:off x="1475656" y="3861048"/>
-            <a:ext cx="4968552" cy="1962715"/>
-          </a:xfrm>
-          <a:prstGeom prst="rect">
-            <a:avLst/>
-          </a:prstGeom>
-        </p:spPr>
-      </p:pic>
-    </p:spTree>
-    <p:extLst>
-      <p:ext uri="{BB962C8B-B14F-4D97-AF65-F5344CB8AC3E}">
-        <p14:creationId xmlns:p14="http://schemas.microsoft.com/office/powerpoint/2010/main" val="1498605448"/>
-      </p:ext>
-    </p:extLst>
-  </p:cSld>
-  <p:clrMapOvr>
-    <a:masterClrMapping/>
-  </p:clrMapOvr>
-  <p:timing>
-    <p:tnLst>
-      <p:par>
-        <p:cTn id="1" dur="indefinite" restart="never" nodeType="tmRoot"/>
-      </p:par>
-    </p:tnLst>
-  </p:timing>
-</p:sld>
-</file>
-
-<file path=ppt/slides/slide20.xml><?xml version="1.0" encoding="utf-8"?>
-<p:sld xmlns:a="http://schemas.openxmlformats.org/drawingml/2006/main" xmlns:r="http://schemas.openxmlformats.org/officeDocument/2006/relationships" xmlns:p="http://schemas.openxmlformats.org/presentationml/2006/main">
-  <p:cSld>
-    <p:spTree>
-      <p:nvGrpSpPr>
-        <p:cNvPr id="1" name=""/>
-        <p:cNvGrpSpPr/>
-        <p:nvPr/>
-      </p:nvGrpSpPr>
-      <p:grpSpPr>
-        <a:xfrm>
-          <a:off x="0" y="0"/>
-          <a:ext cx="0" cy="0"/>
-          <a:chOff x="0" y="0"/>
-          <a:chExt cx="0" cy="0"/>
-        </a:xfrm>
-      </p:grpSpPr>
-      <p:sp>
-        <p:nvSpPr>
-          <p:cNvPr id="2" name="Titre 1"/>
-          <p:cNvSpPr>
-            <a:spLocks noGrp="1"/>
-          </p:cNvSpPr>
-          <p:nvPr>
-            <p:ph type="title"/>
-          </p:nvPr>
-        </p:nvSpPr>
-        <p:spPr/>
-        <p:txBody>
-          <a:bodyPr/>
-          <a:lstStyle/>
-          <a:p>
-            <a:r>
-              <a:rPr lang="fr-FR" dirty="0" smtClean="0"/>
-              <a:t>Filtrage</a:t>
-            </a:r>
-            <a:endParaRPr lang="fr-FR" dirty="0"/>
-          </a:p>
-        </p:txBody>
-      </p:sp>
-      <p:sp>
-        <p:nvSpPr>
-          <p:cNvPr id="3" name="Espace réservé du contenu 2"/>
-          <p:cNvSpPr>
-            <a:spLocks noGrp="1"/>
-          </p:cNvSpPr>
-          <p:nvPr>
-            <p:ph idx="1"/>
-          </p:nvPr>
-        </p:nvSpPr>
-        <p:spPr/>
-        <p:txBody>
-          <a:bodyPr/>
-          <a:lstStyle/>
-          <a:p>
-            <a:r>
-              <a:rPr lang="fr-FR" dirty="0" smtClean="0"/>
-              <a:t>x </a:t>
-            </a:r>
-            <a:r>
-              <a:rPr lang="fr-FR" dirty="0"/>
-              <a:t>= </a:t>
-            </a:r>
-            <a:r>
-              <a:rPr lang="fr-FR" dirty="0" err="1" smtClean="0"/>
-              <a:t>np.random.rand</a:t>
-            </a:r>
-            <a:r>
-              <a:rPr lang="fr-FR" dirty="0" smtClean="0"/>
-              <a:t>(10)</a:t>
-            </a:r>
-            <a:endParaRPr lang="fr-FR" dirty="0"/>
-          </a:p>
-          <a:p>
-            <a:r>
-              <a:rPr lang="fr-FR" dirty="0"/>
-              <a:t>x &gt; </a:t>
-            </a:r>
-            <a:r>
-              <a:rPr lang="fr-FR" dirty="0" smtClean="0"/>
-              <a:t>0.5</a:t>
-            </a:r>
-          </a:p>
-          <a:p>
-            <a:pPr lvl="1"/>
-            <a:r>
-              <a:rPr lang="fr-FR" dirty="0" smtClean="0"/>
-              <a:t>Renvoie un tableau de booléens</a:t>
-            </a:r>
-          </a:p>
-          <a:p>
-            <a:r>
-              <a:rPr lang="fr-FR" dirty="0" smtClean="0"/>
-              <a:t>X[</a:t>
-            </a:r>
-            <a:r>
-              <a:rPr lang="fr-FR" dirty="0" err="1" smtClean="0"/>
-              <a:t>booleans</a:t>
-            </a:r>
-            <a:r>
-              <a:rPr lang="fr-FR" dirty="0" smtClean="0"/>
-              <a:t>]</a:t>
-            </a:r>
-          </a:p>
-          <a:p>
-            <a:pPr lvl="1"/>
-            <a:r>
-              <a:rPr lang="fr-FR" dirty="0" smtClean="0"/>
-              <a:t>Filtre</a:t>
-            </a:r>
-          </a:p>
-          <a:p>
-            <a:pPr lvl="1"/>
-            <a:r>
-              <a:rPr lang="fr-FR" dirty="0" smtClean="0"/>
-              <a:t>X[x &gt; 0.5]</a:t>
-            </a:r>
-            <a:endParaRPr lang="fr-FR" dirty="0"/>
-          </a:p>
-        </p:txBody>
-      </p:sp>
-    </p:spTree>
-    <p:extLst>
-      <p:ext uri="{BB962C8B-B14F-4D97-AF65-F5344CB8AC3E}">
-        <p14:creationId xmlns:p14="http://schemas.microsoft.com/office/powerpoint/2010/main" val="1871390466"/>
-      </p:ext>
-    </p:extLst>
-  </p:cSld>
-  <p:clrMapOvr>
-    <a:masterClrMapping/>
-  </p:clrMapOvr>
-  <p:timing>
-    <p:tnLst>
-      <p:par>
-        <p:cTn id="1" dur="indefinite" restart="never" nodeType="tmRoot"/>
-      </p:par>
-    </p:tnLst>
-  </p:timing>
-</p:sld>
-</file>
-
-<file path=ppt/slides/slide21.xml><?xml version="1.0" encoding="utf-8"?>
-<p:sld xmlns:a="http://schemas.openxmlformats.org/drawingml/2006/main" xmlns:r="http://schemas.openxmlformats.org/officeDocument/2006/relationships" xmlns:p="http://schemas.openxmlformats.org/presentationml/2006/main">
-  <p:cSld>
-    <p:spTree>
-      <p:nvGrpSpPr>
-        <p:cNvPr id="1" name=""/>
-        <p:cNvGrpSpPr/>
-        <p:nvPr/>
-      </p:nvGrpSpPr>
-      <p:grpSpPr>
-        <a:xfrm>
-          <a:off x="0" y="0"/>
-          <a:ext cx="0" cy="0"/>
-          <a:chOff x="0" y="0"/>
-          <a:chExt cx="0" cy="0"/>
-        </a:xfrm>
-      </p:grpSpPr>
-      <p:sp>
-        <p:nvSpPr>
-          <p:cNvPr id="2" name="Titre 1"/>
-          <p:cNvSpPr>
-            <a:spLocks noGrp="1"/>
-          </p:cNvSpPr>
-          <p:nvPr>
-            <p:ph type="title"/>
-          </p:nvPr>
-        </p:nvSpPr>
-        <p:spPr/>
-        <p:txBody>
-          <a:bodyPr/>
-          <a:lstStyle/>
-          <a:p>
-            <a:r>
-              <a:rPr lang="fr-FR" dirty="0" err="1" smtClean="0"/>
-              <a:t>Matplotlib</a:t>
-            </a:r>
-            <a:endParaRPr lang="fr-FR" dirty="0"/>
-          </a:p>
-        </p:txBody>
-      </p:sp>
-      <p:sp>
-        <p:nvSpPr>
-          <p:cNvPr id="3" name="Espace réservé du contenu 2"/>
-          <p:cNvSpPr>
-            <a:spLocks noGrp="1"/>
-          </p:cNvSpPr>
-          <p:nvPr>
-            <p:ph idx="1"/>
-          </p:nvPr>
-        </p:nvSpPr>
-        <p:spPr/>
-        <p:txBody>
-          <a:bodyPr/>
-          <a:lstStyle/>
-          <a:p>
-            <a:r>
-              <a:rPr lang="fr-FR" dirty="0" err="1" smtClean="0"/>
-              <a:t>Matplotlib</a:t>
-            </a:r>
-            <a:r>
-              <a:rPr lang="fr-FR" dirty="0" smtClean="0"/>
-              <a:t> est complètement compatible avec les </a:t>
-            </a:r>
-            <a:r>
-              <a:rPr lang="fr-FR" dirty="0" err="1" smtClean="0"/>
               <a:t>np.array</a:t>
             </a:r>
             <a:endParaRPr lang="fr-FR" dirty="0"/>
@@ -5833,17 +4904,10 @@
   <p:clrMapOvr>
     <a:masterClrMapping/>
   </p:clrMapOvr>
-  <p:timing>
-    <p:tnLst>
-      <p:par>
-        <p:cTn id="1" dur="indefinite" restart="never" nodeType="tmRoot"/>
-      </p:par>
-    </p:tnLst>
-  </p:timing>
 </p:sld>
 </file>
 
-<file path=ppt/slides/slide22.xml><?xml version="1.0" encoding="utf-8"?>
+<file path=ppt/slides/slide18.xml><?xml version="1.0" encoding="utf-8"?>
 <p:sld xmlns:a="http://schemas.openxmlformats.org/drawingml/2006/main" xmlns:r="http://schemas.openxmlformats.org/officeDocument/2006/relationships" xmlns:p="http://schemas.openxmlformats.org/presentationml/2006/main">
   <p:cSld>
     <p:spTree>
@@ -5887,14 +4951,13 @@
           <a:lstStyle/>
           <a:p>
             <a:r>
-              <a:rPr lang="en-US" dirty="0" err="1" smtClean="0"/>
+              <a:rPr lang="en-US" dirty="0" err="1"/>
               <a:t>Sauvegarder</a:t>
             </a:r>
             <a:r>
-              <a:rPr lang="en-US" dirty="0" smtClean="0"/>
+              <a:rPr lang="en-US" dirty="0"/>
               <a:t> des tableaux</a:t>
             </a:r>
-            <a:endParaRPr lang="en-US" dirty="0"/>
           </a:p>
         </p:txBody>
       </p:sp>
@@ -5953,51 +5016,19 @@
                 <a:latin typeface="Courier New" panose="02070309020205020404" pitchFamily="49" charset="0"/>
                 <a:cs typeface="Courier New" panose="02070309020205020404" pitchFamily="49" charset="0"/>
               </a:rPr>
-              <a:t>’, </a:t>
-            </a:r>
-            <a:r>
-              <a:rPr lang="en-US" dirty="0" smtClean="0">
-                <a:latin typeface="Courier New" panose="02070309020205020404" pitchFamily="49" charset="0"/>
-                <a:cs typeface="Courier New" panose="02070309020205020404" pitchFamily="49" charset="0"/>
-              </a:rPr>
-              <a:t>v1 = v1</a:t>
-            </a:r>
-            <a:r>
-              <a:rPr lang="en-US" dirty="0" smtClean="0">
-                <a:latin typeface="Courier New" panose="02070309020205020404" pitchFamily="49" charset="0"/>
-                <a:cs typeface="Courier New" panose="02070309020205020404" pitchFamily="49" charset="0"/>
-              </a:rPr>
-              <a:t>)</a:t>
-            </a:r>
-            <a:endParaRPr lang="en-US" dirty="0">
-              <a:latin typeface="Courier New" panose="02070309020205020404" pitchFamily="49" charset="0"/>
-              <a:cs typeface="Courier New" panose="02070309020205020404" pitchFamily="49" charset="0"/>
-            </a:endParaRPr>
+              <a:t>’, v1 = v1)</a:t>
+            </a:r>
           </a:p>
           <a:p>
             <a:pPr marL="0" indent="0">
               <a:buNone/>
             </a:pPr>
-            <a:r>
-              <a:rPr lang="en-US" dirty="0" smtClean="0">
-                <a:latin typeface="Courier New" panose="02070309020205020404" pitchFamily="49" charset="0"/>
-                <a:cs typeface="Courier New" panose="02070309020205020404" pitchFamily="49" charset="0"/>
-              </a:rPr>
-              <a:t>data</a:t>
-            </a:r>
-            <a:r>
-              <a:rPr lang="en-US" dirty="0" smtClean="0">
-                <a:latin typeface="Courier New" panose="02070309020205020404" pitchFamily="49" charset="0"/>
-                <a:cs typeface="Courier New" panose="02070309020205020404" pitchFamily="49" charset="0"/>
-              </a:rPr>
-              <a:t> </a:t>
-            </a:r>
             <a:r>
               <a:rPr lang="en-US" dirty="0">
                 <a:latin typeface="Courier New" panose="02070309020205020404" pitchFamily="49" charset="0"/>
                 <a:cs typeface="Courier New" panose="02070309020205020404" pitchFamily="49" charset="0"/>
               </a:rPr>
-              <a:t>= </a:t>
+              <a:t>data = </a:t>
             </a:r>
             <a:r>
               <a:rPr lang="en-US" dirty="0" err="1">
@@ -6021,7 +5052,7 @@
               <a:t>data.npz</a:t>
             </a:r>
             <a:r>
-              <a:rPr lang="en-US" dirty="0" smtClean="0">
+              <a:rPr lang="en-US" dirty="0">
                 <a:latin typeface="Courier New" panose="02070309020205020404" pitchFamily="49" charset="0"/>
                 <a:cs typeface="Courier New" panose="02070309020205020404" pitchFamily="49" charset="0"/>
               </a:rPr>
@@ -6037,19 +5068,8 @@
                 <a:latin typeface="Courier New" panose="02070309020205020404" pitchFamily="49" charset="0"/>
                 <a:cs typeface="Courier New" panose="02070309020205020404" pitchFamily="49" charset="0"/>
               </a:rPr>
-              <a:t>v</a:t>
-            </a:r>
-            <a:r>
-              <a:rPr lang="en-US" dirty="0" smtClean="0">
-                <a:latin typeface="Courier New" panose="02070309020205020404" pitchFamily="49" charset="0"/>
-                <a:cs typeface="Courier New" panose="02070309020205020404" pitchFamily="49" charset="0"/>
-              </a:rPr>
-              <a:t>1 = data[‘v1’]</a:t>
-            </a:r>
-            <a:endParaRPr lang="en-US" dirty="0">
-              <a:latin typeface="Courier New" panose="02070309020205020404" pitchFamily="49" charset="0"/>
-              <a:cs typeface="Courier New" panose="02070309020205020404" pitchFamily="49" charset="0"/>
-            </a:endParaRPr>
+              <a:t>v1 = data[‘v1’]</a:t>
+            </a:r>
           </a:p>
           <a:p>
             <a:pPr marL="0" indent="0">
@@ -6084,7 +5104,7 @@
           <a:p>
             <a:fld id="{4FAB73BC-B049-4115-A692-8D63A059BFB8}" type="slidenum">
               <a:rPr lang="en-US" smtClean="0"/>
-              <a:t>22</a:t>
+              <a:t>18</a:t>
             </a:fld>
             <a:endParaRPr lang="en-US" dirty="0"/>
           </a:p>
@@ -6100,13 +5120,143 @@
   <p:clrMapOvr>
     <a:masterClrMapping/>
   </p:clrMapOvr>
-  <p:timing>
-    <p:tnLst>
-      <p:par>
-        <p:cTn id="1" dur="indefinite" restart="never" nodeType="tmRoot"/>
-      </p:par>
-    </p:tnLst>
-  </p:timing>
+</p:sld>
+</file>
+
+<file path=ppt/slides/slide2.xml><?xml version="1.0" encoding="utf-8"?>
+<p:sld xmlns:a="http://schemas.openxmlformats.org/drawingml/2006/main" xmlns:r="http://schemas.openxmlformats.org/officeDocument/2006/relationships" xmlns:p="http://schemas.openxmlformats.org/presentationml/2006/main">
+  <p:cSld>
+    <p:spTree>
+      <p:nvGrpSpPr>
+        <p:cNvPr id="1" name=""/>
+        <p:cNvGrpSpPr/>
+        <p:nvPr/>
+      </p:nvGrpSpPr>
+      <p:grpSpPr>
+        <a:xfrm>
+          <a:off x="0" y="0"/>
+          <a:ext cx="0" cy="0"/>
+          <a:chOff x="0" y="0"/>
+          <a:chExt cx="0" cy="0"/>
+        </a:xfrm>
+      </p:grpSpPr>
+      <p:sp>
+        <p:nvSpPr>
+          <p:cNvPr id="2" name="Titre 1"/>
+          <p:cNvSpPr>
+            <a:spLocks noGrp="1"/>
+          </p:cNvSpPr>
+          <p:nvPr>
+            <p:ph type="title"/>
+          </p:nvPr>
+        </p:nvSpPr>
+        <p:spPr/>
+        <p:txBody>
+          <a:bodyPr/>
+          <a:lstStyle/>
+          <a:p>
+            <a:r>
+              <a:rPr lang="fr-FR" dirty="0"/>
+              <a:t>Python et les Maths</a:t>
+            </a:r>
+          </a:p>
+        </p:txBody>
+      </p:sp>
+      <p:sp>
+        <p:nvSpPr>
+          <p:cNvPr id="3" name="Espace réservé du contenu 2"/>
+          <p:cNvSpPr>
+            <a:spLocks noGrp="1"/>
+          </p:cNvSpPr>
+          <p:nvPr>
+            <p:ph idx="1"/>
+          </p:nvPr>
+        </p:nvSpPr>
+        <p:spPr/>
+        <p:txBody>
+          <a:bodyPr/>
+          <a:lstStyle/>
+          <a:p>
+            <a:r>
+              <a:rPr lang="fr-FR" dirty="0"/>
+              <a:t>Python a rencontré un grand succès dans le monde scientifique, mathématiques et de l’IA</a:t>
+            </a:r>
+          </a:p>
+          <a:p>
+            <a:r>
+              <a:rPr lang="fr-FR" dirty="0"/>
+              <a:t>De nombreux modules sont à disposition</a:t>
+            </a:r>
+          </a:p>
+          <a:p>
+            <a:pPr lvl="1"/>
+            <a:r>
+              <a:rPr lang="fr-FR" dirty="0" err="1"/>
+              <a:t>Numpy</a:t>
+            </a:r>
+            <a:r>
+              <a:rPr lang="fr-FR" dirty="0"/>
+              <a:t>, </a:t>
+            </a:r>
+            <a:r>
+              <a:rPr lang="fr-FR" dirty="0" err="1"/>
+              <a:t>Scipy</a:t>
+            </a:r>
+            <a:r>
+              <a:rPr lang="fr-FR" dirty="0"/>
+              <a:t>, </a:t>
+            </a:r>
+            <a:r>
+              <a:rPr lang="fr-FR" dirty="0" err="1"/>
+              <a:t>Scikit-learn</a:t>
+            </a:r>
+            <a:r>
+              <a:rPr lang="fr-FR" dirty="0"/>
+              <a:t>, …</a:t>
+            </a:r>
+          </a:p>
+          <a:p>
+            <a:r>
+              <a:rPr lang="fr-FR" dirty="0"/>
+              <a:t>Le module math possède les méthodes de base</a:t>
+            </a:r>
+          </a:p>
+        </p:txBody>
+      </p:sp>
+      <p:pic>
+        <p:nvPicPr>
+          <p:cNvPr id="5" name="Image 4"/>
+          <p:cNvPicPr>
+            <a:picLocks noChangeAspect="1"/>
+          </p:cNvPicPr>
+          <p:nvPr/>
+        </p:nvPicPr>
+        <p:blipFill>
+          <a:blip r:embed="rId2"/>
+          <a:stretch>
+            <a:fillRect/>
+          </a:stretch>
+        </p:blipFill>
+        <p:spPr>
+          <a:xfrm>
+            <a:off x="1475656" y="3861048"/>
+            <a:ext cx="4968552" cy="1962715"/>
+          </a:xfrm>
+          <a:prstGeom prst="rect">
+            <a:avLst/>
+          </a:prstGeom>
+        </p:spPr>
+      </p:pic>
+    </p:spTree>
+    <p:extLst>
+      <p:ext uri="{BB962C8B-B14F-4D97-AF65-F5344CB8AC3E}">
+        <p14:creationId xmlns:p14="http://schemas.microsoft.com/office/powerpoint/2010/main" val="1498605448"/>
+      </p:ext>
+    </p:extLst>
+  </p:cSld>
+  <p:clrMapOvr>
+    <a:masterClrMapping/>
+  </p:clrMapOvr>
 </p:sld>
 </file>
 
@@ -6143,39 +5293,39 @@
           <a:lstStyle/>
           <a:p>
             <a:r>
-              <a:rPr lang="en-US" dirty="0" err="1" smtClean="0"/>
+              <a:rPr lang="en-US" dirty="0" err="1"/>
               <a:t>NumPy</a:t>
             </a:r>
             <a:r>
-              <a:rPr lang="en-US" dirty="0" smtClean="0"/>
+              <a:rPr lang="en-US" dirty="0"/>
               <a:t> </a:t>
             </a:r>
             <a:r>
-              <a:rPr lang="en-US" dirty="0" err="1" smtClean="0"/>
+              <a:rPr lang="en-US" dirty="0" err="1"/>
               <a:t>est</a:t>
             </a:r>
             <a:r>
-              <a:rPr lang="en-US" dirty="0" smtClean="0"/>
+              <a:rPr lang="en-US" dirty="0"/>
               <a:t> un module </a:t>
             </a:r>
             <a:r>
-              <a:rPr lang="en-US" dirty="0" err="1" smtClean="0"/>
+              <a:rPr lang="en-US" dirty="0" err="1"/>
               <a:t>scientifique</a:t>
             </a:r>
             <a:r>
-              <a:rPr lang="en-US" dirty="0" smtClean="0"/>
+              <a:rPr lang="en-US" dirty="0"/>
               <a:t> </a:t>
             </a:r>
             <a:r>
-              <a:rPr lang="en-US" dirty="0" err="1" smtClean="0"/>
+              <a:rPr lang="en-US" dirty="0" err="1"/>
               <a:t>d’algèbre</a:t>
             </a:r>
             <a:r>
-              <a:rPr lang="en-US" dirty="0" smtClean="0"/>
+              <a:rPr lang="en-US" dirty="0"/>
               <a:t> </a:t>
             </a:r>
             <a:r>
-              <a:rPr lang="en-US" dirty="0" err="1" smtClean="0"/>
+              <a:rPr lang="en-US" dirty="0" err="1"/>
               <a:t>linéaire</a:t>
             </a:r>
             <a:endParaRPr lang="en-US" dirty="0"/>
@@ -6183,7 +5333,7 @@
           <a:p>
             <a:pPr lvl="1"/>
             <a:r>
-              <a:rPr lang="en-US" dirty="0" smtClean="0"/>
+              <a:rPr lang="en-US" dirty="0"/>
               <a:t>import </a:t>
             </a:r>
             <a:r>
@@ -6194,19 +5344,18 @@
               <a:rPr lang="en-US" dirty="0"/>
               <a:t> as np</a:t>
             </a:r>
-            <a:endParaRPr lang="en-US" dirty="0" smtClean="0"/>
           </a:p>
           <a:p>
             <a:pPr lvl="1"/>
             <a:r>
-              <a:rPr lang="en-US" dirty="0" smtClean="0"/>
+              <a:rPr lang="en-US" dirty="0"/>
               <a:t>PIP install </a:t>
             </a:r>
             <a:r>
-              <a:rPr lang="en-US" dirty="0" err="1" smtClean="0"/>
+              <a:rPr lang="en-US" dirty="0" err="1"/>
               <a:t>numpy</a:t>
             </a:r>
-            <a:endParaRPr lang="en-US" dirty="0" smtClean="0"/>
+            <a:endParaRPr lang="en-US" dirty="0"/>
           </a:p>
           <a:p>
             <a:pPr lvl="1"/>
@@ -6248,13 +5397,6 @@
   <p:clrMapOvr>
     <a:masterClrMapping/>
   </p:clrMapOvr>
-  <p:timing>
-    <p:tnLst>
-      <p:par>
-        <p:cTn id="1" dur="indefinite" restart="never" nodeType="tmRoot"/>
-      </p:par>
-    </p:tnLst>
-  </p:timing>
 </p:sld>
 </file>
 
@@ -6330,15 +5472,15 @@
               <a:buNone/>
             </a:pPr>
             <a:r>
-              <a:rPr lang="en-US" sz="1800" dirty="0" err="1" smtClean="0"/>
+              <a:rPr lang="en-US" sz="1800" dirty="0" err="1"/>
               <a:t>Liste</a:t>
             </a:r>
             <a:r>
-              <a:rPr lang="en-US" sz="1800" dirty="0" smtClean="0"/>
+              <a:rPr lang="en-US" sz="1800" dirty="0"/>
               <a:t> de </a:t>
             </a:r>
             <a:r>
-              <a:rPr lang="en-US" sz="1800" dirty="0" err="1" smtClean="0"/>
+              <a:rPr lang="en-US" sz="1800" dirty="0" err="1"/>
               <a:t>nombres</a:t>
             </a:r>
             <a:endParaRPr lang="en-US" sz="1800" dirty="0"/>
@@ -6846,13 +5988,6 @@
   <p:clrMapOvr>
     <a:masterClrMapping/>
   </p:clrMapOvr>
-  <p:timing>
-    <p:tnLst>
-      <p:par>
-        <p:cTn id="1" dur="indefinite" restart="never" nodeType="tmRoot"/>
-      </p:par>
-    </p:tnLst>
-  </p:timing>
 </p:sld>
 </file>
 
@@ -6889,10 +6024,10 @@
           <a:lstStyle/>
           <a:p>
             <a:r>
-              <a:rPr lang="en-US" dirty="0" err="1" smtClean="0"/>
-              <a:t>Np.array</a:t>
-            </a:r>
-            <a:endParaRPr lang="en-US" dirty="0" smtClean="0"/>
+              <a:rPr lang="en-US" dirty="0" err="1"/>
+              <a:t>np.array</a:t>
+            </a:r>
+            <a:endParaRPr lang="en-US" dirty="0"/>
           </a:p>
           <a:p>
             <a:pPr lvl="1"/>
@@ -6906,23 +6041,19 @@
             </a:r>
             <a:r>
               <a:rPr lang="fr-FR" dirty="0"/>
-              <a:t> ne peuvent contenir des membres que d'un seul </a:t>
-            </a:r>
-            <a:r>
-              <a:rPr lang="fr-FR" dirty="0" smtClean="0"/>
-              <a:t>type</a:t>
+              <a:t> ne peuvent contenir des membres que d'un seul type</a:t>
             </a:r>
           </a:p>
           <a:p>
             <a:pPr lvl="1"/>
             <a:r>
-              <a:rPr lang="fr-FR" dirty="0" smtClean="0"/>
+              <a:rPr lang="fr-FR" dirty="0"/>
               <a:t>Le type est soit explicite ou implicite</a:t>
             </a:r>
           </a:p>
           <a:p>
             <a:r>
-              <a:rPr lang="fr-FR" dirty="0" smtClean="0"/>
+              <a:rPr lang="fr-FR" dirty="0"/>
               <a:t>Exemples :</a:t>
             </a:r>
           </a:p>
@@ -6934,17 +6065,13 @@
             </a:r>
             <a:r>
               <a:rPr lang="en-US" dirty="0"/>
-              <a:t>([1, 4, 2, 5, 3</a:t>
-            </a:r>
-            <a:r>
-              <a:rPr lang="en-US" dirty="0" smtClean="0"/>
-              <a:t>]) #</a:t>
-            </a:r>
-            <a:r>
-              <a:rPr lang="en-US" dirty="0" err="1" smtClean="0"/>
+              <a:t>([1, 4, 2, 5, 3]) #</a:t>
+            </a:r>
+            <a:r>
+              <a:rPr lang="en-US" dirty="0" err="1"/>
               <a:t>int</a:t>
             </a:r>
-            <a:endParaRPr lang="en-US" dirty="0" smtClean="0"/>
+            <a:endParaRPr lang="en-US" dirty="0"/>
           </a:p>
           <a:p>
             <a:pPr lvl="1"/>
@@ -6954,26 +6081,18 @@
             </a:r>
             <a:r>
               <a:rPr lang="en-US" dirty="0"/>
-              <a:t>([3.14, 4, 2, 3</a:t>
-            </a:r>
-            <a:r>
-              <a:rPr lang="en-US" dirty="0" smtClean="0"/>
-              <a:t>]) #float</a:t>
+              <a:t>([3.14, 4., 2, 3]) #float</a:t>
             </a:r>
           </a:p>
           <a:p>
             <a:pPr lvl="1"/>
             <a:r>
-              <a:rPr lang="fr-FR" dirty="0" err="1" smtClean="0"/>
+              <a:rPr lang="fr-FR" dirty="0" err="1"/>
               <a:t>np.zeros</a:t>
             </a:r>
             <a:r>
-              <a:rPr lang="fr-FR" dirty="0" smtClean="0"/>
-              <a:t>(10</a:t>
-            </a:r>
-            <a:r>
               <a:rPr lang="fr-FR" dirty="0"/>
-              <a:t>, </a:t>
+              <a:t>(10, </a:t>
             </a:r>
             <a:r>
               <a:rPr lang="fr-FR" dirty="0" err="1"/>
@@ -6988,19 +6107,18 @@
               <a:t>int</a:t>
             </a:r>
             <a:r>
-              <a:rPr lang="fr-FR" dirty="0" smtClean="0"/>
+              <a:rPr lang="fr-FR" dirty="0"/>
               <a:t>) #10*0</a:t>
             </a:r>
-            <a:endParaRPr lang="fr-FR" dirty="0"/>
           </a:p>
           <a:p>
             <a:pPr lvl="1"/>
             <a:r>
-              <a:rPr lang="fr-FR" dirty="0" err="1" smtClean="0"/>
+              <a:rPr lang="fr-FR" dirty="0" err="1"/>
               <a:t>np.ones</a:t>
             </a:r>
             <a:r>
-              <a:rPr lang="fr-FR" dirty="0" smtClean="0"/>
+              <a:rPr lang="fr-FR" dirty="0"/>
               <a:t>(3, </a:t>
             </a:r>
             <a:r>
@@ -7016,30 +6134,21 @@
               <a:t>float</a:t>
             </a:r>
             <a:r>
-              <a:rPr lang="fr-FR" dirty="0" smtClean="0"/>
+              <a:rPr lang="fr-FR" dirty="0"/>
               <a:t>) #3*1.0</a:t>
             </a:r>
-            <a:endParaRPr lang="fr-FR" dirty="0"/>
           </a:p>
           <a:p>
             <a:pPr lvl="1"/>
             <a:r>
-              <a:rPr lang="fr-FR" dirty="0" err="1" smtClean="0"/>
+              <a:rPr lang="fr-FR" dirty="0" err="1"/>
               <a:t>np.full</a:t>
             </a:r>
             <a:r>
-              <a:rPr lang="fr-FR" dirty="0" smtClean="0"/>
-              <a:t>(3, </a:t>
-            </a:r>
-            <a:r>
               <a:rPr lang="fr-FR" dirty="0"/>
-              <a:t>3.14</a:t>
-            </a:r>
-            <a:r>
-              <a:rPr lang="fr-FR" dirty="0" smtClean="0"/>
-              <a:t>) #3*3.14</a:t>
-            </a:r>
-            <a:endParaRPr lang="en-US" dirty="0" smtClean="0"/>
+              <a:t>(3, 3.14) #3*3.14</a:t>
+            </a:r>
+            <a:endParaRPr lang="en-US" dirty="0"/>
           </a:p>
           <a:p>
             <a:pPr lvl="1"/>
@@ -7081,13 +6190,6 @@
   <p:clrMapOvr>
     <a:masterClrMapping/>
   </p:clrMapOvr>
-  <p:timing>
-    <p:tnLst>
-      <p:par>
-        <p:cTn id="1" dur="indefinite" restart="never" nodeType="tmRoot"/>
-      </p:par>
-    </p:tnLst>
-  </p:timing>
 </p:sld>
 </file>
 
@@ -7158,756 +6260,6 @@
           <a:lstStyle/>
           <a:p>
             <a:r>
-              <a:rPr lang="en-US" b="1" dirty="0" err="1"/>
-              <a:t>np.ones</a:t>
-            </a:r>
-            <a:r>
-              <a:rPr lang="en-US" b="1" dirty="0"/>
-              <a:t>, </a:t>
-            </a:r>
-            <a:r>
-              <a:rPr lang="en-US" b="1" dirty="0" err="1"/>
-              <a:t>np.zeros</a:t>
-            </a:r>
-            <a:endParaRPr lang="en-US" b="1" dirty="0"/>
-          </a:p>
-          <a:p>
-            <a:r>
-              <a:rPr lang="en-US" dirty="0" err="1"/>
-              <a:t>np.arange</a:t>
-            </a:r>
-            <a:endParaRPr lang="en-US" dirty="0"/>
-          </a:p>
-          <a:p>
-            <a:r>
-              <a:rPr lang="en-US" dirty="0" err="1"/>
-              <a:t>np.concatenate</a:t>
-            </a:r>
-            <a:endParaRPr lang="en-US" dirty="0"/>
-          </a:p>
-          <a:p>
-            <a:r>
-              <a:rPr lang="en-US" dirty="0" err="1"/>
-              <a:t>np.astype</a:t>
-            </a:r>
-            <a:endParaRPr lang="en-US" dirty="0"/>
-          </a:p>
-          <a:p>
-            <a:r>
-              <a:rPr lang="en-US" dirty="0" err="1"/>
-              <a:t>np.zeros_like</a:t>
-            </a:r>
-            <a:r>
-              <a:rPr lang="en-US" dirty="0"/>
-              <a:t>, </a:t>
-            </a:r>
-            <a:r>
-              <a:rPr lang="en-US" dirty="0" err="1"/>
-              <a:t>np.ones_like</a:t>
-            </a:r>
-            <a:endParaRPr lang="en-US" dirty="0"/>
-          </a:p>
-          <a:p>
-            <a:r>
-              <a:rPr lang="en-US" dirty="0" err="1"/>
-              <a:t>np.random.random</a:t>
-            </a:r>
-            <a:endParaRPr lang="en-US" dirty="0"/>
-          </a:p>
-        </p:txBody>
-      </p:sp>
-      <p:pic>
-        <p:nvPicPr>
-          <p:cNvPr id="2050" name="Picture 2" descr="https://i.gyazo.com/ab7c9b4e16c8a76d8dc7704d30051267.png">
-            <a:extLst>
-              <a:ext uri="{FF2B5EF4-FFF2-40B4-BE49-F238E27FC236}">
-                <a16:creationId xmlns:a16="http://schemas.microsoft.com/office/drawing/2014/main" id="{4E5B0FD0-66E1-4D88-AE87-FFD566AA0188}"/>
-              </a:ext>
-            </a:extLst>
-          </p:cNvPr>
-          <p:cNvPicPr>
-            <a:picLocks noGrp="1" noChangeAspect="1" noChangeArrowheads="1"/>
-          </p:cNvPicPr>
-          <p:nvPr>
-            <p:ph sz="half" idx="2"/>
-          </p:nvPr>
-        </p:nvPicPr>
-        <p:blipFill>
-          <a:blip r:embed="rId2">
-            <a:extLst>
-              <a:ext uri="{28A0092B-C50C-407E-A947-70E740481C1C}">
-                <a14:useLocalDpi xmlns:a14="http://schemas.microsoft.com/office/drawing/2010/main" val="0"/>
-              </a:ext>
-            </a:extLst>
-          </a:blip>
-          <a:srcRect/>
-          <a:stretch>
-            <a:fillRect/>
-          </a:stretch>
-        </p:blipFill>
-        <p:spPr bwMode="auto">
-          <a:xfrm>
-            <a:off x="4857548" y="2268551"/>
-            <a:ext cx="4092777" cy="742388"/>
-          </a:xfrm>
-          <a:prstGeom prst="rect">
-            <a:avLst/>
-          </a:prstGeom>
-          <a:noFill/>
-          <a:extLst>
-            <a:ext uri="{909E8E84-426E-40DD-AFC4-6F175D3DCCD1}">
-              <a14:hiddenFill xmlns:a14="http://schemas.microsoft.com/office/drawing/2010/main">
-                <a:solidFill>
-                  <a:srgbClr val="FFFFFF"/>
-                </a:solidFill>
-              </a14:hiddenFill>
-            </a:ext>
-          </a:extLst>
-        </p:spPr>
-      </p:pic>
-      <p:pic>
-        <p:nvPicPr>
-          <p:cNvPr id="2052" name="Picture 4" descr="https://i.gyazo.com/155ad9075990c94c1e98b750d365d49a.png">
-            <a:extLst>
-              <a:ext uri="{FF2B5EF4-FFF2-40B4-BE49-F238E27FC236}">
-                <a16:creationId xmlns:a16="http://schemas.microsoft.com/office/drawing/2014/main" id="{F8350C03-9BBC-461B-8603-1E1869FA1D8B}"/>
-              </a:ext>
-            </a:extLst>
-          </p:cNvPr>
-          <p:cNvPicPr>
-            <a:picLocks noChangeAspect="1" noChangeArrowheads="1"/>
-          </p:cNvPicPr>
-          <p:nvPr/>
-        </p:nvPicPr>
-        <p:blipFill>
-          <a:blip r:embed="rId3">
-            <a:extLst>
-              <a:ext uri="{28A0092B-C50C-407E-A947-70E740481C1C}">
-                <a14:useLocalDpi xmlns:a14="http://schemas.microsoft.com/office/drawing/2010/main" val="0"/>
-              </a:ext>
-            </a:extLst>
-          </a:blip>
-          <a:srcRect/>
-          <a:stretch>
-            <a:fillRect/>
-          </a:stretch>
-        </p:blipFill>
-        <p:spPr bwMode="auto">
-          <a:xfrm>
-            <a:off x="4899819" y="3340846"/>
-            <a:ext cx="4050506" cy="1835944"/>
-          </a:xfrm>
-          <a:prstGeom prst="rect">
-            <a:avLst/>
-          </a:prstGeom>
-          <a:noFill/>
-          <a:extLst>
-            <a:ext uri="{909E8E84-426E-40DD-AFC4-6F175D3DCCD1}">
-              <a14:hiddenFill xmlns:a14="http://schemas.microsoft.com/office/drawing/2010/main">
-                <a:solidFill>
-                  <a:srgbClr val="FFFFFF"/>
-                </a:solidFill>
-              </a14:hiddenFill>
-            </a:ext>
-          </a:extLst>
-        </p:spPr>
-      </p:pic>
-      <p:sp>
-        <p:nvSpPr>
-          <p:cNvPr id="4" name="Slide Number Placeholder 3">
-            <a:extLst>
-              <a:ext uri="{FF2B5EF4-FFF2-40B4-BE49-F238E27FC236}">
-                <a16:creationId xmlns:a16="http://schemas.microsoft.com/office/drawing/2014/main" id="{92D2687B-855C-4168-B171-855746B25D67}"/>
-              </a:ext>
-            </a:extLst>
-          </p:cNvPr>
-          <p:cNvSpPr>
-            <a:spLocks noGrp="1"/>
-          </p:cNvSpPr>
-          <p:nvPr>
-            <p:ph type="sldNum" sz="quarter" idx="4294967295"/>
-          </p:nvPr>
-        </p:nvSpPr>
-        <p:spPr/>
-        <p:txBody>
-          <a:bodyPr>
-            <a:normAutofit fontScale="25000" lnSpcReduction="20000"/>
-          </a:bodyPr>
-          <a:lstStyle/>
-          <a:p>
-            <a:fld id="{4FAB73BC-B049-4115-A692-8D63A059BFB8}" type="slidenum">
-              <a:rPr lang="en-US" smtClean="0"/>
-              <a:t>6</a:t>
-            </a:fld>
-            <a:endParaRPr lang="en-US" dirty="0"/>
-          </a:p>
-        </p:txBody>
-      </p:sp>
-    </p:spTree>
-    <p:extLst>
-      <p:ext uri="{BB962C8B-B14F-4D97-AF65-F5344CB8AC3E}">
-        <p14:creationId xmlns:p14="http://schemas.microsoft.com/office/powerpoint/2010/main" val="993841195"/>
-      </p:ext>
-    </p:extLst>
-  </p:cSld>
-  <p:clrMapOvr>
-    <a:masterClrMapping/>
-  </p:clrMapOvr>
-  <p:timing>
-    <p:tnLst>
-      <p:par>
-        <p:cTn id="1" dur="indefinite" restart="never" nodeType="tmRoot"/>
-      </p:par>
-    </p:tnLst>
-  </p:timing>
-</p:sld>
-</file>
-
-<file path=ppt/slides/slide7.xml><?xml version="1.0" encoding="utf-8"?>
-<p:sld xmlns:a="http://schemas.openxmlformats.org/drawingml/2006/main" xmlns:r="http://schemas.openxmlformats.org/officeDocument/2006/relationships" xmlns:p="http://schemas.openxmlformats.org/presentationml/2006/main">
-  <p:cSld>
-    <p:spTree>
-      <p:nvGrpSpPr>
-        <p:cNvPr id="1" name=""/>
-        <p:cNvGrpSpPr/>
-        <p:nvPr/>
-      </p:nvGrpSpPr>
-      <p:grpSpPr>
-        <a:xfrm>
-          <a:off x="0" y="0"/>
-          <a:ext cx="0" cy="0"/>
-          <a:chOff x="0" y="0"/>
-          <a:chExt cx="0" cy="0"/>
-        </a:xfrm>
-      </p:grpSpPr>
-      <p:sp>
-        <p:nvSpPr>
-          <p:cNvPr id="2" name="Title 1">
-            <a:extLst>
-              <a:ext uri="{FF2B5EF4-FFF2-40B4-BE49-F238E27FC236}">
-                <a16:creationId xmlns:a16="http://schemas.microsoft.com/office/drawing/2014/main" id="{F8C3A89D-B04F-4FF7-B864-B3F9BBFBE530}"/>
-              </a:ext>
-            </a:extLst>
-          </p:cNvPr>
-          <p:cNvSpPr>
-            <a:spLocks noGrp="1"/>
-          </p:cNvSpPr>
-          <p:nvPr>
-            <p:ph type="title"/>
-          </p:nvPr>
-        </p:nvSpPr>
-        <p:spPr/>
-        <p:txBody>
-          <a:bodyPr/>
-          <a:lstStyle/>
-          <a:p>
-            <a:r>
-              <a:rPr lang="en-US" dirty="0"/>
-              <a:t>Arrays, creation</a:t>
-            </a:r>
-          </a:p>
-        </p:txBody>
-      </p:sp>
-      <p:sp>
-        <p:nvSpPr>
-          <p:cNvPr id="3" name="Content Placeholder 2">
-            <a:extLst>
-              <a:ext uri="{FF2B5EF4-FFF2-40B4-BE49-F238E27FC236}">
-                <a16:creationId xmlns:a16="http://schemas.microsoft.com/office/drawing/2014/main" id="{E06060F4-F2F0-4A93-BA3A-8F21AA583A86}"/>
-              </a:ext>
-            </a:extLst>
-          </p:cNvPr>
-          <p:cNvSpPr>
-            <a:spLocks noGrp="1"/>
-          </p:cNvSpPr>
-          <p:nvPr>
-            <p:ph sz="half" idx="1"/>
-          </p:nvPr>
-        </p:nvSpPr>
-        <p:spPr/>
-        <p:txBody>
-          <a:bodyPr/>
-          <a:lstStyle/>
-          <a:p>
-            <a:r>
-              <a:rPr lang="en-US" dirty="0" err="1"/>
-              <a:t>np.ones</a:t>
-            </a:r>
-            <a:r>
-              <a:rPr lang="en-US" dirty="0"/>
-              <a:t>, </a:t>
-            </a:r>
-            <a:r>
-              <a:rPr lang="en-US" dirty="0" err="1"/>
-              <a:t>np.zeros</a:t>
-            </a:r>
-            <a:endParaRPr lang="en-US" dirty="0"/>
-          </a:p>
-          <a:p>
-            <a:r>
-              <a:rPr lang="en-US" dirty="0" err="1"/>
-              <a:t>np.arange</a:t>
-            </a:r>
-            <a:endParaRPr lang="en-US" dirty="0"/>
-          </a:p>
-          <a:p>
-            <a:r>
-              <a:rPr lang="en-US" b="1" dirty="0" err="1"/>
-              <a:t>np.concatenate</a:t>
-            </a:r>
-            <a:endParaRPr lang="en-US" b="1" dirty="0"/>
-          </a:p>
-          <a:p>
-            <a:r>
-              <a:rPr lang="en-US" dirty="0" err="1"/>
-              <a:t>np.astype</a:t>
-            </a:r>
-            <a:endParaRPr lang="en-US" dirty="0"/>
-          </a:p>
-          <a:p>
-            <a:r>
-              <a:rPr lang="en-US" dirty="0" err="1"/>
-              <a:t>np.zeros_like</a:t>
-            </a:r>
-            <a:r>
-              <a:rPr lang="en-US" dirty="0"/>
-              <a:t>, </a:t>
-            </a:r>
-            <a:r>
-              <a:rPr lang="en-US" dirty="0" err="1"/>
-              <a:t>np.ones_like</a:t>
-            </a:r>
-            <a:endParaRPr lang="en-US" dirty="0"/>
-          </a:p>
-          <a:p>
-            <a:r>
-              <a:rPr lang="en-US" dirty="0" err="1"/>
-              <a:t>np.random.random</a:t>
-            </a:r>
-            <a:endParaRPr lang="en-US" dirty="0"/>
-          </a:p>
-        </p:txBody>
-      </p:sp>
-      <p:pic>
-        <p:nvPicPr>
-          <p:cNvPr id="4098" name="Picture 2" descr="https://i.gyazo.com/c234df7922627afc111c3a02ede104fe.png">
-            <a:extLst>
-              <a:ext uri="{FF2B5EF4-FFF2-40B4-BE49-F238E27FC236}">
-                <a16:creationId xmlns:a16="http://schemas.microsoft.com/office/drawing/2014/main" id="{614819F5-ED63-4F34-9FD4-B6D4F23FC57A}"/>
-              </a:ext>
-            </a:extLst>
-          </p:cNvPr>
-          <p:cNvPicPr>
-            <a:picLocks noGrp="1" noChangeAspect="1" noChangeArrowheads="1"/>
-          </p:cNvPicPr>
-          <p:nvPr>
-            <p:ph sz="half" idx="2"/>
-          </p:nvPr>
-        </p:nvPicPr>
-        <p:blipFill>
-          <a:blip r:embed="rId2">
-            <a:extLst>
-              <a:ext uri="{28A0092B-C50C-407E-A947-70E740481C1C}">
-                <a14:useLocalDpi xmlns:a14="http://schemas.microsoft.com/office/drawing/2010/main" val="0"/>
-              </a:ext>
-            </a:extLst>
-          </a:blip>
-          <a:srcRect/>
-          <a:stretch>
-            <a:fillRect/>
-          </a:stretch>
-        </p:blipFill>
-        <p:spPr bwMode="auto">
-          <a:xfrm>
-            <a:off x="4788024" y="2132856"/>
-            <a:ext cx="4015209" cy="3263503"/>
-          </a:xfrm>
-          <a:prstGeom prst="rect">
-            <a:avLst/>
-          </a:prstGeom>
-          <a:noFill/>
-          <a:extLst>
-            <a:ext uri="{909E8E84-426E-40DD-AFC4-6F175D3DCCD1}">
-              <a14:hiddenFill xmlns:a14="http://schemas.microsoft.com/office/drawing/2010/main">
-                <a:solidFill>
-                  <a:srgbClr val="FFFFFF"/>
-                </a:solidFill>
-              </a14:hiddenFill>
-            </a:ext>
-          </a:extLst>
-        </p:spPr>
-      </p:pic>
-      <p:sp>
-        <p:nvSpPr>
-          <p:cNvPr id="4" name="Slide Number Placeholder 3">
-            <a:extLst>
-              <a:ext uri="{FF2B5EF4-FFF2-40B4-BE49-F238E27FC236}">
-                <a16:creationId xmlns:a16="http://schemas.microsoft.com/office/drawing/2014/main" id="{D6A3119A-E469-41A1-8702-2A1963EE0729}"/>
-              </a:ext>
-            </a:extLst>
-          </p:cNvPr>
-          <p:cNvSpPr>
-            <a:spLocks noGrp="1"/>
-          </p:cNvSpPr>
-          <p:nvPr>
-            <p:ph type="sldNum" sz="quarter" idx="4294967295"/>
-          </p:nvPr>
-        </p:nvSpPr>
-        <p:spPr/>
-        <p:txBody>
-          <a:bodyPr>
-            <a:normAutofit fontScale="25000" lnSpcReduction="20000"/>
-          </a:bodyPr>
-          <a:lstStyle/>
-          <a:p>
-            <a:fld id="{4FAB73BC-B049-4115-A692-8D63A059BFB8}" type="slidenum">
-              <a:rPr lang="en-US" smtClean="0"/>
-              <a:t>7</a:t>
-            </a:fld>
-            <a:endParaRPr lang="en-US" dirty="0"/>
-          </a:p>
-        </p:txBody>
-      </p:sp>
-    </p:spTree>
-    <p:extLst>
-      <p:ext uri="{BB962C8B-B14F-4D97-AF65-F5344CB8AC3E}">
-        <p14:creationId xmlns:p14="http://schemas.microsoft.com/office/powerpoint/2010/main" val="684741186"/>
-      </p:ext>
-    </p:extLst>
-  </p:cSld>
-  <p:clrMapOvr>
-    <a:masterClrMapping/>
-  </p:clrMapOvr>
-  <p:timing>
-    <p:tnLst>
-      <p:par>
-        <p:cTn id="1" dur="indefinite" restart="never" nodeType="tmRoot"/>
-      </p:par>
-    </p:tnLst>
-  </p:timing>
-</p:sld>
-</file>
-
-<file path=ppt/slides/slide8.xml><?xml version="1.0" encoding="utf-8"?>
-<p:sld xmlns:a="http://schemas.openxmlformats.org/drawingml/2006/main" xmlns:r="http://schemas.openxmlformats.org/officeDocument/2006/relationships" xmlns:p="http://schemas.openxmlformats.org/presentationml/2006/main">
-  <p:cSld>
-    <p:spTree>
-      <p:nvGrpSpPr>
-        <p:cNvPr id="1" name=""/>
-        <p:cNvGrpSpPr/>
-        <p:nvPr/>
-      </p:nvGrpSpPr>
-      <p:grpSpPr>
-        <a:xfrm>
-          <a:off x="0" y="0"/>
-          <a:ext cx="0" cy="0"/>
-          <a:chOff x="0" y="0"/>
-          <a:chExt cx="0" cy="0"/>
-        </a:xfrm>
-      </p:grpSpPr>
-      <p:sp>
-        <p:nvSpPr>
-          <p:cNvPr id="2" name="Title 1">
-            <a:extLst>
-              <a:ext uri="{FF2B5EF4-FFF2-40B4-BE49-F238E27FC236}">
-                <a16:creationId xmlns:a16="http://schemas.microsoft.com/office/drawing/2014/main" id="{F8C3A89D-B04F-4FF7-B864-B3F9BBFBE530}"/>
-              </a:ext>
-            </a:extLst>
-          </p:cNvPr>
-          <p:cNvSpPr>
-            <a:spLocks noGrp="1"/>
-          </p:cNvSpPr>
-          <p:nvPr>
-            <p:ph type="title"/>
-          </p:nvPr>
-        </p:nvSpPr>
-        <p:spPr>
-          <a:xfrm>
-            <a:off x="946404" y="1131570"/>
-            <a:ext cx="7269480" cy="994172"/>
-          </a:xfrm>
-        </p:spPr>
-        <p:txBody>
-          <a:bodyPr/>
-          <a:lstStyle/>
-          <a:p>
-            <a:r>
-              <a:rPr lang="en-US" dirty="0"/>
-              <a:t>Arrays, creation</a:t>
-            </a:r>
-          </a:p>
-        </p:txBody>
-      </p:sp>
-      <p:sp>
-        <p:nvSpPr>
-          <p:cNvPr id="3" name="Content Placeholder 2">
-            <a:extLst>
-              <a:ext uri="{FF2B5EF4-FFF2-40B4-BE49-F238E27FC236}">
-                <a16:creationId xmlns:a16="http://schemas.microsoft.com/office/drawing/2014/main" id="{E06060F4-F2F0-4A93-BA3A-8F21AA583A86}"/>
-              </a:ext>
-            </a:extLst>
-          </p:cNvPr>
-          <p:cNvSpPr>
-            <a:spLocks noGrp="1"/>
-          </p:cNvSpPr>
-          <p:nvPr>
-            <p:ph sz="half" idx="1"/>
-          </p:nvPr>
-        </p:nvSpPr>
-        <p:spPr/>
-        <p:txBody>
-          <a:bodyPr/>
-          <a:lstStyle/>
-          <a:p>
-            <a:r>
-              <a:rPr lang="en-US" dirty="0" err="1"/>
-              <a:t>np.ones</a:t>
-            </a:r>
-            <a:r>
-              <a:rPr lang="en-US" dirty="0"/>
-              <a:t>, </a:t>
-            </a:r>
-            <a:r>
-              <a:rPr lang="en-US" dirty="0" err="1"/>
-              <a:t>np.zeros</a:t>
-            </a:r>
-            <a:endParaRPr lang="en-US" dirty="0"/>
-          </a:p>
-          <a:p>
-            <a:r>
-              <a:rPr lang="en-US" dirty="0" err="1"/>
-              <a:t>np.arange</a:t>
-            </a:r>
-            <a:endParaRPr lang="en-US" dirty="0"/>
-          </a:p>
-          <a:p>
-            <a:r>
-              <a:rPr lang="en-US" b="1" dirty="0" err="1"/>
-              <a:t>np.concatenate</a:t>
-            </a:r>
-            <a:endParaRPr lang="en-US" b="1" dirty="0"/>
-          </a:p>
-          <a:p>
-            <a:r>
-              <a:rPr lang="en-US" dirty="0" err="1"/>
-              <a:t>np.astype</a:t>
-            </a:r>
-            <a:endParaRPr lang="en-US" dirty="0"/>
-          </a:p>
-          <a:p>
-            <a:r>
-              <a:rPr lang="en-US" dirty="0" err="1"/>
-              <a:t>np.zeros_like</a:t>
-            </a:r>
-            <a:r>
-              <a:rPr lang="en-US" dirty="0"/>
-              <a:t>, </a:t>
-            </a:r>
-            <a:r>
-              <a:rPr lang="en-US" dirty="0" err="1"/>
-              <a:t>np.ones_like</a:t>
-            </a:r>
-            <a:endParaRPr lang="en-US" dirty="0"/>
-          </a:p>
-          <a:p>
-            <a:r>
-              <a:rPr lang="en-US" dirty="0" err="1"/>
-              <a:t>np.random.random</a:t>
-            </a:r>
-            <a:endParaRPr lang="en-US" dirty="0"/>
-          </a:p>
-        </p:txBody>
-      </p:sp>
-      <p:sp>
-        <p:nvSpPr>
-          <p:cNvPr id="4" name="Slide Number Placeholder 3">
-            <a:extLst>
-              <a:ext uri="{FF2B5EF4-FFF2-40B4-BE49-F238E27FC236}">
-                <a16:creationId xmlns:a16="http://schemas.microsoft.com/office/drawing/2014/main" id="{D6A3119A-E469-41A1-8702-2A1963EE0729}"/>
-              </a:ext>
-            </a:extLst>
-          </p:cNvPr>
-          <p:cNvSpPr>
-            <a:spLocks noGrp="1"/>
-          </p:cNvSpPr>
-          <p:nvPr>
-            <p:ph type="sldNum" sz="quarter" idx="4294967295"/>
-          </p:nvPr>
-        </p:nvSpPr>
-        <p:spPr/>
-        <p:txBody>
-          <a:bodyPr>
-            <a:normAutofit fontScale="25000" lnSpcReduction="20000"/>
-          </a:bodyPr>
-          <a:lstStyle/>
-          <a:p>
-            <a:fld id="{4FAB73BC-B049-4115-A692-8D63A059BFB8}" type="slidenum">
-              <a:rPr lang="en-US" smtClean="0"/>
-              <a:t>8</a:t>
-            </a:fld>
-            <a:endParaRPr lang="en-US" dirty="0"/>
-          </a:p>
-        </p:txBody>
-      </p:sp>
-      <p:sp>
-        <p:nvSpPr>
-          <p:cNvPr id="6" name="Content Placeholder 5">
-            <a:extLst>
-              <a:ext uri="{FF2B5EF4-FFF2-40B4-BE49-F238E27FC236}">
-                <a16:creationId xmlns:a16="http://schemas.microsoft.com/office/drawing/2014/main" id="{2AB091C9-0DFE-46FD-A91B-91E846760D0E}"/>
-              </a:ext>
-            </a:extLst>
-          </p:cNvPr>
-          <p:cNvSpPr>
-            <a:spLocks noGrp="1"/>
-          </p:cNvSpPr>
-          <p:nvPr>
-            <p:ph sz="half" idx="2"/>
-          </p:nvPr>
-        </p:nvSpPr>
-        <p:spPr/>
-        <p:txBody>
-          <a:bodyPr/>
-          <a:lstStyle/>
-          <a:p>
-            <a:endParaRPr lang="en-US" dirty="0"/>
-          </a:p>
-        </p:txBody>
-      </p:sp>
-      <p:pic>
-        <p:nvPicPr>
-          <p:cNvPr id="1028" name="Picture 4" descr="https://i.gyazo.com/9b34cbafccfb8d9f78bdc66e8a0b283c.png">
-            <a:extLst>
-              <a:ext uri="{FF2B5EF4-FFF2-40B4-BE49-F238E27FC236}">
-                <a16:creationId xmlns:a16="http://schemas.microsoft.com/office/drawing/2014/main" id="{F8464E02-05B7-4134-8D2A-B820C34B1200}"/>
-              </a:ext>
-            </a:extLst>
-          </p:cNvPr>
-          <p:cNvPicPr>
-            <a:picLocks noChangeAspect="1" noChangeArrowheads="1"/>
-          </p:cNvPicPr>
-          <p:nvPr/>
-        </p:nvPicPr>
-        <p:blipFill>
-          <a:blip r:embed="rId2">
-            <a:extLst>
-              <a:ext uri="{28A0092B-C50C-407E-A947-70E740481C1C}">
-                <a14:useLocalDpi xmlns:a14="http://schemas.microsoft.com/office/drawing/2010/main" val="0"/>
-              </a:ext>
-            </a:extLst>
-          </a:blip>
-          <a:srcRect/>
-          <a:stretch>
-            <a:fillRect/>
-          </a:stretch>
-        </p:blipFill>
-        <p:spPr bwMode="auto">
-          <a:xfrm>
-            <a:off x="4716016" y="2492896"/>
-            <a:ext cx="4286250" cy="1857375"/>
-          </a:xfrm>
-          <a:prstGeom prst="rect">
-            <a:avLst/>
-          </a:prstGeom>
-          <a:noFill/>
-          <a:extLst>
-            <a:ext uri="{909E8E84-426E-40DD-AFC4-6F175D3DCCD1}">
-              <a14:hiddenFill xmlns:a14="http://schemas.microsoft.com/office/drawing/2010/main">
-                <a:solidFill>
-                  <a:srgbClr val="FFFFFF"/>
-                </a:solidFill>
-              </a14:hiddenFill>
-            </a:ext>
-          </a:extLst>
-        </p:spPr>
-      </p:pic>
-    </p:spTree>
-    <p:extLst>
-      <p:ext uri="{BB962C8B-B14F-4D97-AF65-F5344CB8AC3E}">
-        <p14:creationId xmlns:p14="http://schemas.microsoft.com/office/powerpoint/2010/main" val="672012865"/>
-      </p:ext>
-    </p:extLst>
-  </p:cSld>
-  <p:clrMapOvr>
-    <a:masterClrMapping/>
-  </p:clrMapOvr>
-  <p:timing>
-    <p:tnLst>
-      <p:par>
-        <p:cTn id="1" dur="indefinite" restart="never" nodeType="tmRoot"/>
-      </p:par>
-    </p:tnLst>
-  </p:timing>
-</p:sld>
-</file>
-
-<file path=ppt/slides/slide9.xml><?xml version="1.0" encoding="utf-8"?>
-<p:sld xmlns:a="http://schemas.openxmlformats.org/drawingml/2006/main" xmlns:r="http://schemas.openxmlformats.org/officeDocument/2006/relationships" xmlns:p="http://schemas.openxmlformats.org/presentationml/2006/main">
-  <p:cSld>
-    <p:spTree>
-      <p:nvGrpSpPr>
-        <p:cNvPr id="1" name=""/>
-        <p:cNvGrpSpPr/>
-        <p:nvPr/>
-      </p:nvGrpSpPr>
-      <p:grpSpPr>
-        <a:xfrm>
-          <a:off x="0" y="0"/>
-          <a:ext cx="0" cy="0"/>
-          <a:chOff x="0" y="0"/>
-          <a:chExt cx="0" cy="0"/>
-        </a:xfrm>
-      </p:grpSpPr>
-      <p:sp>
-        <p:nvSpPr>
-          <p:cNvPr id="2" name="Title 1">
-            <a:extLst>
-              <a:ext uri="{FF2B5EF4-FFF2-40B4-BE49-F238E27FC236}">
-                <a16:creationId xmlns:a16="http://schemas.microsoft.com/office/drawing/2014/main" id="{F8C3A89D-B04F-4FF7-B864-B3F9BBFBE530}"/>
-              </a:ext>
-            </a:extLst>
-          </p:cNvPr>
-          <p:cNvSpPr>
-            <a:spLocks noGrp="1"/>
-          </p:cNvSpPr>
-          <p:nvPr>
-            <p:ph type="title"/>
-          </p:nvPr>
-        </p:nvSpPr>
-        <p:spPr/>
-        <p:txBody>
-          <a:bodyPr/>
-          <a:lstStyle/>
-          <a:p>
-            <a:r>
-              <a:rPr lang="en-US" dirty="0"/>
-              <a:t>Arrays, creation</a:t>
-            </a:r>
-          </a:p>
-        </p:txBody>
-      </p:sp>
-      <p:sp>
-        <p:nvSpPr>
-          <p:cNvPr id="3" name="Content Placeholder 2">
-            <a:extLst>
-              <a:ext uri="{FF2B5EF4-FFF2-40B4-BE49-F238E27FC236}">
-                <a16:creationId xmlns:a16="http://schemas.microsoft.com/office/drawing/2014/main" id="{E06060F4-F2F0-4A93-BA3A-8F21AA583A86}"/>
-              </a:ext>
-            </a:extLst>
-          </p:cNvPr>
-          <p:cNvSpPr>
-            <a:spLocks noGrp="1"/>
-          </p:cNvSpPr>
-          <p:nvPr>
-            <p:ph sz="half" idx="1"/>
-          </p:nvPr>
-        </p:nvSpPr>
-        <p:spPr/>
-        <p:txBody>
-          <a:bodyPr/>
-          <a:lstStyle/>
-          <a:p>
-            <a:r>
               <a:rPr lang="en-US" dirty="0" err="1"/>
               <a:t>np.ones</a:t>
             </a:r>
@@ -7991,7 +6343,7 @@
           <a:p>
             <a:fld id="{4FAB73BC-B049-4115-A692-8D63A059BFB8}" type="slidenum">
               <a:rPr lang="en-US" smtClean="0"/>
-              <a:t>9</a:t>
+              <a:t>6</a:t>
             </a:fld>
             <a:endParaRPr lang="en-US" dirty="0"/>
           </a:p>
@@ -8054,13 +6406,408 @@
   <p:clrMapOvr>
     <a:masterClrMapping/>
   </p:clrMapOvr>
-  <p:timing>
-    <p:tnLst>
-      <p:par>
-        <p:cTn id="1" dur="indefinite" restart="never" nodeType="tmRoot"/>
-      </p:par>
-    </p:tnLst>
-  </p:timing>
+</p:sld>
+</file>
+
+<file path=ppt/slides/slide7.xml><?xml version="1.0" encoding="utf-8"?>
+<p:sld xmlns:a="http://schemas.openxmlformats.org/drawingml/2006/main" xmlns:r="http://schemas.openxmlformats.org/officeDocument/2006/relationships" xmlns:p="http://schemas.openxmlformats.org/presentationml/2006/main">
+  <p:cSld>
+    <p:spTree>
+      <p:nvGrpSpPr>
+        <p:cNvPr id="1" name=""/>
+        <p:cNvGrpSpPr/>
+        <p:nvPr/>
+      </p:nvGrpSpPr>
+      <p:grpSpPr>
+        <a:xfrm>
+          <a:off x="0" y="0"/>
+          <a:ext cx="0" cy="0"/>
+          <a:chOff x="0" y="0"/>
+          <a:chExt cx="0" cy="0"/>
+        </a:xfrm>
+      </p:grpSpPr>
+      <p:sp>
+        <p:nvSpPr>
+          <p:cNvPr id="2" name="Titre 1"/>
+          <p:cNvSpPr>
+            <a:spLocks noGrp="1"/>
+          </p:cNvSpPr>
+          <p:nvPr>
+            <p:ph type="title"/>
+          </p:nvPr>
+        </p:nvSpPr>
+        <p:spPr/>
+        <p:txBody>
+          <a:bodyPr/>
+          <a:lstStyle/>
+          <a:p>
+            <a:r>
+              <a:rPr lang="fr-FR" dirty="0" err="1"/>
+              <a:t>arange</a:t>
+            </a:r>
+            <a:endParaRPr lang="fr-FR" dirty="0"/>
+          </a:p>
+        </p:txBody>
+      </p:sp>
+      <p:sp>
+        <p:nvSpPr>
+          <p:cNvPr id="3" name="Espace réservé du contenu 2"/>
+          <p:cNvSpPr>
+            <a:spLocks noGrp="1"/>
+          </p:cNvSpPr>
+          <p:nvPr>
+            <p:ph idx="1"/>
+          </p:nvPr>
+        </p:nvSpPr>
+        <p:spPr/>
+        <p:txBody>
+          <a:bodyPr/>
+          <a:lstStyle/>
+          <a:p>
+            <a:r>
+              <a:rPr lang="fr-FR" dirty="0"/>
+              <a:t># Un tableau rempli d'une séquence linéaire</a:t>
+            </a:r>
+          </a:p>
+          <a:p>
+            <a:r>
+              <a:rPr lang="fr-FR" dirty="0"/>
+              <a:t># commençant à 0 et qui se termine à 20, avec un pas de 2</a:t>
+            </a:r>
+          </a:p>
+          <a:p>
+            <a:r>
+              <a:rPr lang="fr-FR" dirty="0" err="1"/>
+              <a:t>np.arange</a:t>
+            </a:r>
+            <a:r>
+              <a:rPr lang="fr-FR" dirty="0"/>
+              <a:t>(0, 20, 2)</a:t>
+            </a:r>
+          </a:p>
+          <a:p>
+            <a:r>
+              <a:rPr lang="fr-FR" dirty="0"/>
+              <a:t># Un tableau de 5 valeurs, espacées uniformément entre 0 et 1</a:t>
+            </a:r>
+          </a:p>
+          <a:p>
+            <a:r>
+              <a:rPr lang="fr-FR" dirty="0" err="1"/>
+              <a:t>np.linspace</a:t>
+            </a:r>
+            <a:r>
+              <a:rPr lang="fr-FR" dirty="0"/>
+              <a:t>(0, 1, 5)</a:t>
+            </a:r>
+          </a:p>
+        </p:txBody>
+      </p:sp>
+    </p:spTree>
+    <p:extLst>
+      <p:ext uri="{BB962C8B-B14F-4D97-AF65-F5344CB8AC3E}">
+        <p14:creationId xmlns:p14="http://schemas.microsoft.com/office/powerpoint/2010/main" val="3214626482"/>
+      </p:ext>
+    </p:extLst>
+  </p:cSld>
+  <p:clrMapOvr>
+    <a:masterClrMapping/>
+  </p:clrMapOvr>
+</p:sld>
+</file>
+
+<file path=ppt/slides/slide8.xml><?xml version="1.0" encoding="utf-8"?>
+<p:sld xmlns:a="http://schemas.openxmlformats.org/drawingml/2006/main" xmlns:r="http://schemas.openxmlformats.org/officeDocument/2006/relationships" xmlns:p="http://schemas.openxmlformats.org/presentationml/2006/main">
+  <p:cSld>
+    <p:spTree>
+      <p:nvGrpSpPr>
+        <p:cNvPr id="1" name=""/>
+        <p:cNvGrpSpPr/>
+        <p:nvPr/>
+      </p:nvGrpSpPr>
+      <p:grpSpPr>
+        <a:xfrm>
+          <a:off x="0" y="0"/>
+          <a:ext cx="0" cy="0"/>
+          <a:chOff x="0" y="0"/>
+          <a:chExt cx="0" cy="0"/>
+        </a:xfrm>
+      </p:grpSpPr>
+      <p:sp>
+        <p:nvSpPr>
+          <p:cNvPr id="2" name="Title 1">
+            <a:extLst>
+              <a:ext uri="{FF2B5EF4-FFF2-40B4-BE49-F238E27FC236}">
+                <a16:creationId xmlns:a16="http://schemas.microsoft.com/office/drawing/2014/main" id="{F8C3A89D-B04F-4FF7-B864-B3F9BBFBE530}"/>
+              </a:ext>
+            </a:extLst>
+          </p:cNvPr>
+          <p:cNvSpPr>
+            <a:spLocks noGrp="1"/>
+          </p:cNvSpPr>
+          <p:nvPr>
+            <p:ph type="title"/>
+          </p:nvPr>
+        </p:nvSpPr>
+        <p:spPr/>
+        <p:txBody>
+          <a:bodyPr/>
+          <a:lstStyle/>
+          <a:p>
+            <a:r>
+              <a:rPr lang="en-US" dirty="0"/>
+              <a:t>Arrays, creation</a:t>
+            </a:r>
+          </a:p>
+        </p:txBody>
+      </p:sp>
+      <p:sp>
+        <p:nvSpPr>
+          <p:cNvPr id="3" name="Content Placeholder 2">
+            <a:extLst>
+              <a:ext uri="{FF2B5EF4-FFF2-40B4-BE49-F238E27FC236}">
+                <a16:creationId xmlns:a16="http://schemas.microsoft.com/office/drawing/2014/main" id="{E06060F4-F2F0-4A93-BA3A-8F21AA583A86}"/>
+              </a:ext>
+            </a:extLst>
+          </p:cNvPr>
+          <p:cNvSpPr>
+            <a:spLocks noGrp="1"/>
+          </p:cNvSpPr>
+          <p:nvPr>
+            <p:ph sz="half" idx="1"/>
+          </p:nvPr>
+        </p:nvSpPr>
+        <p:spPr/>
+        <p:txBody>
+          <a:bodyPr/>
+          <a:lstStyle/>
+          <a:p>
+            <a:r>
+              <a:rPr lang="en-US" dirty="0" err="1"/>
+              <a:t>np.ones</a:t>
+            </a:r>
+            <a:r>
+              <a:rPr lang="en-US" dirty="0"/>
+              <a:t>, </a:t>
+            </a:r>
+            <a:r>
+              <a:rPr lang="en-US" dirty="0" err="1"/>
+              <a:t>np.zeros</a:t>
+            </a:r>
+            <a:endParaRPr lang="en-US" dirty="0"/>
+          </a:p>
+          <a:p>
+            <a:r>
+              <a:rPr lang="en-US" b="1" dirty="0" err="1"/>
+              <a:t>np.arange</a:t>
+            </a:r>
+            <a:endParaRPr lang="en-US" b="1" dirty="0"/>
+          </a:p>
+          <a:p>
+            <a:r>
+              <a:rPr lang="en-US" dirty="0" err="1"/>
+              <a:t>np.concatenate</a:t>
+            </a:r>
+            <a:endParaRPr lang="en-US" dirty="0"/>
+          </a:p>
+          <a:p>
+            <a:r>
+              <a:rPr lang="en-US" dirty="0" err="1"/>
+              <a:t>np.astype</a:t>
+            </a:r>
+            <a:endParaRPr lang="en-US" dirty="0"/>
+          </a:p>
+          <a:p>
+            <a:r>
+              <a:rPr lang="en-US" dirty="0" err="1"/>
+              <a:t>np.zeros_like</a:t>
+            </a:r>
+            <a:r>
+              <a:rPr lang="en-US" dirty="0"/>
+              <a:t>, </a:t>
+            </a:r>
+            <a:r>
+              <a:rPr lang="en-US" dirty="0" err="1"/>
+              <a:t>np.ones_like</a:t>
+            </a:r>
+            <a:endParaRPr lang="en-US" dirty="0"/>
+          </a:p>
+          <a:p>
+            <a:r>
+              <a:rPr lang="en-US" dirty="0" err="1"/>
+              <a:t>np.random.random</a:t>
+            </a:r>
+            <a:endParaRPr lang="en-US" dirty="0"/>
+          </a:p>
+        </p:txBody>
+      </p:sp>
+      <p:pic>
+        <p:nvPicPr>
+          <p:cNvPr id="3076" name="Picture 4" descr="https://i.gyazo.com/8001a5fae4b908ca4cdec3a018885ba7.png">
+            <a:extLst>
+              <a:ext uri="{FF2B5EF4-FFF2-40B4-BE49-F238E27FC236}">
+                <a16:creationId xmlns:a16="http://schemas.microsoft.com/office/drawing/2014/main" id="{F932B43B-F42C-4E3D-8306-84FD7EA80D09}"/>
+              </a:ext>
+            </a:extLst>
+          </p:cNvPr>
+          <p:cNvPicPr>
+            <a:picLocks noGrp="1" noChangeAspect="1" noChangeArrowheads="1"/>
+          </p:cNvPicPr>
+          <p:nvPr>
+            <p:ph sz="half" idx="2"/>
+          </p:nvPr>
+        </p:nvPicPr>
+        <p:blipFill>
+          <a:blip r:embed="rId2">
+            <a:extLst>
+              <a:ext uri="{28A0092B-C50C-407E-A947-70E740481C1C}">
+                <a14:useLocalDpi xmlns:a14="http://schemas.microsoft.com/office/drawing/2010/main" val="0"/>
+              </a:ext>
+            </a:extLst>
+          </a:blip>
+          <a:srcRect/>
+          <a:stretch>
+            <a:fillRect/>
+          </a:stretch>
+        </p:blipFill>
+        <p:spPr bwMode="auto">
+          <a:xfrm>
+            <a:off x="4061748" y="3573016"/>
+            <a:ext cx="4858985" cy="719166"/>
+          </a:xfrm>
+          <a:prstGeom prst="rect">
+            <a:avLst/>
+          </a:prstGeom>
+          <a:noFill/>
+          <a:extLst>
+            <a:ext uri="{909E8E84-426E-40DD-AFC4-6F175D3DCCD1}">
+              <a14:hiddenFill xmlns:a14="http://schemas.microsoft.com/office/drawing/2010/main">
+                <a:solidFill>
+                  <a:srgbClr val="FFFFFF"/>
+                </a:solidFill>
+              </a14:hiddenFill>
+            </a:ext>
+          </a:extLst>
+        </p:spPr>
+      </p:pic>
+      <p:sp>
+        <p:nvSpPr>
+          <p:cNvPr id="4" name="Slide Number Placeholder 3">
+            <a:extLst>
+              <a:ext uri="{FF2B5EF4-FFF2-40B4-BE49-F238E27FC236}">
+                <a16:creationId xmlns:a16="http://schemas.microsoft.com/office/drawing/2014/main" id="{0F3EFB67-0BB7-4EE7-8621-91042C112821}"/>
+              </a:ext>
+            </a:extLst>
+          </p:cNvPr>
+          <p:cNvSpPr>
+            <a:spLocks noGrp="1"/>
+          </p:cNvSpPr>
+          <p:nvPr>
+            <p:ph type="sldNum" sz="quarter" idx="4294967295"/>
+          </p:nvPr>
+        </p:nvSpPr>
+        <p:spPr/>
+        <p:txBody>
+          <a:bodyPr>
+            <a:normAutofit fontScale="25000" lnSpcReduction="20000"/>
+          </a:bodyPr>
+          <a:lstStyle/>
+          <a:p>
+            <a:fld id="{4FAB73BC-B049-4115-A692-8D63A059BFB8}" type="slidenum">
+              <a:rPr lang="en-US" smtClean="0"/>
+              <a:t>8</a:t>
+            </a:fld>
+            <a:endParaRPr lang="en-US" dirty="0"/>
+          </a:p>
+        </p:txBody>
+      </p:sp>
+    </p:spTree>
+    <p:extLst>
+      <p:ext uri="{BB962C8B-B14F-4D97-AF65-F5344CB8AC3E}">
+        <p14:creationId xmlns:p14="http://schemas.microsoft.com/office/powerpoint/2010/main" val="636031390"/>
+      </p:ext>
+    </p:extLst>
+  </p:cSld>
+  <p:clrMapOvr>
+    <a:masterClrMapping/>
+  </p:clrMapOvr>
+</p:sld>
+</file>
+
+<file path=ppt/slides/slide9.xml><?xml version="1.0" encoding="utf-8"?>
+<p:sld xmlns:a="http://schemas.openxmlformats.org/drawingml/2006/main" xmlns:r="http://schemas.openxmlformats.org/officeDocument/2006/relationships" xmlns:p="http://schemas.openxmlformats.org/presentationml/2006/main">
+  <p:cSld>
+    <p:spTree>
+      <p:nvGrpSpPr>
+        <p:cNvPr id="1" name=""/>
+        <p:cNvGrpSpPr/>
+        <p:nvPr/>
+      </p:nvGrpSpPr>
+      <p:grpSpPr>
+        <a:xfrm>
+          <a:off x="0" y="0"/>
+          <a:ext cx="0" cy="0"/>
+          <a:chOff x="0" y="0"/>
+          <a:chExt cx="0" cy="0"/>
+        </a:xfrm>
+      </p:grpSpPr>
+      <p:sp>
+        <p:nvSpPr>
+          <p:cNvPr id="2" name="Titre 1"/>
+          <p:cNvSpPr>
+            <a:spLocks noGrp="1"/>
+          </p:cNvSpPr>
+          <p:nvPr>
+            <p:ph type="title"/>
+          </p:nvPr>
+        </p:nvSpPr>
+        <p:spPr/>
+        <p:txBody>
+          <a:bodyPr/>
+          <a:lstStyle/>
+          <a:p>
+            <a:r>
+              <a:rPr lang="fr-FR" dirty="0" err="1"/>
+              <a:t>Random</a:t>
+            </a:r>
+            <a:endParaRPr lang="fr-FR" dirty="0"/>
+          </a:p>
+        </p:txBody>
+      </p:sp>
+      <p:pic>
+        <p:nvPicPr>
+          <p:cNvPr id="4" name="Image 3"/>
+          <p:cNvPicPr>
+            <a:picLocks noChangeAspect="1"/>
+          </p:cNvPicPr>
+          <p:nvPr/>
+        </p:nvPicPr>
+        <p:blipFill>
+          <a:blip r:embed="rId2"/>
+          <a:stretch>
+            <a:fillRect/>
+          </a:stretch>
+        </p:blipFill>
+        <p:spPr>
+          <a:xfrm>
+            <a:off x="827584" y="1156209"/>
+            <a:ext cx="7466207" cy="3744416"/>
+          </a:xfrm>
+          <a:prstGeom prst="rect">
+            <a:avLst/>
+          </a:prstGeom>
+        </p:spPr>
+      </p:pic>
+    </p:spTree>
+    <p:extLst>
+      <p:ext uri="{BB962C8B-B14F-4D97-AF65-F5344CB8AC3E}">
+        <p14:creationId xmlns:p14="http://schemas.microsoft.com/office/powerpoint/2010/main" val="2677605873"/>
+      </p:ext>
+    </p:extLst>
+  </p:cSld>
+  <p:clrMapOvr>
+    <a:masterClrMapping/>
+  </p:clrMapOvr>
 </p:sld>
 </file>
 
